--- a/docs/TrackVault-Training.pptx
+++ b/docs/TrackVault-Training.pptx
@@ -2192,7 +2192,7 @@
     <p:bg>
       <p:bgPr>
         <a:solidFill>
-          <a:srgbClr val="05090D"/>
+          <a:srgbClr val="FFFFFF"/>
         </a:solidFill>
       </p:bgPr>
     </p:bg>
@@ -2212,27 +2212,7 @@
       </p:grpSpPr>
       <p:sp>
         <p:nvSpPr>
-          <p:cNvPr id="2" name="Shape 0"/>
-          <p:cNvSpPr/>
-          <p:nvPr/>
-        </p:nvSpPr>
-        <p:spPr>
-          <a:xfrm>
-            <a:off x="0" y="0"/>
-            <a:ext cx="12188952" cy="6858000"/>
-          </a:xfrm>
-          <a:prstGeom prst="rect">
-            <a:avLst/>
-          </a:prstGeom>
-          <a:solidFill>
-            <a:srgbClr val="05090D"/>
-          </a:solidFill>
-          <a:ln/>
-        </p:spPr>
-      </p:sp>
-      <p:sp>
-        <p:nvSpPr>
-          <p:cNvPr id="3" name="Text 1"/>
+          <p:cNvPr id="2" name="Text 0"/>
           <p:cNvSpPr/>
           <p:nvPr/>
         </p:nvSpPr>
@@ -2257,7 +2237,7 @@
             <a:r>
               <a:rPr lang="en-US" sz="1200" b="1" spc="300" kern="0" dirty="0">
                 <a:solidFill>
-                  <a:srgbClr val="2ADF8F"/>
+                  <a:srgbClr val="147A3D"/>
                 </a:solidFill>
                 <a:latin typeface="Calibri" pitchFamily="34" charset="0"/>
                 <a:ea typeface="Calibri" pitchFamily="34" charset="-122"/>
@@ -2271,7 +2251,7 @@
       </p:sp>
       <p:sp>
         <p:nvSpPr>
-          <p:cNvPr id="4" name="Text 2"/>
+          <p:cNvPr id="3" name="Text 1"/>
           <p:cNvSpPr/>
           <p:nvPr/>
         </p:nvSpPr>
@@ -2299,7 +2279,7 @@
             <a:r>
               <a:rPr lang="en-US" sz="4400" b="1" dirty="0">
                 <a:solidFill>
-                  <a:srgbClr val="E6F2EA"/>
+                  <a:srgbClr val="13202E"/>
                 </a:solidFill>
                 <a:latin typeface="Calibri" pitchFamily="34" charset="0"/>
                 <a:ea typeface="Calibri" pitchFamily="34" charset="-122"/>
@@ -2316,7 +2296,7 @@
             <a:r>
               <a:rPr lang="en-US" sz="4400" b="1" dirty="0">
                 <a:solidFill>
-                  <a:srgbClr val="2ADF8F"/>
+                  <a:srgbClr val="147A3D"/>
                 </a:solidFill>
                 <a:latin typeface="Calibri" pitchFamily="34" charset="0"/>
                 <a:ea typeface="Calibri" pitchFamily="34" charset="-122"/>
@@ -2336,7 +2316,7 @@
             <a:r>
               <a:rPr lang="en-US" sz="4400" b="1" dirty="0">
                 <a:solidFill>
-                  <a:srgbClr val="2ADF8F"/>
+                  <a:srgbClr val="147A3D"/>
                 </a:solidFill>
                 <a:latin typeface="Calibri" pitchFamily="34" charset="0"/>
                 <a:ea typeface="Calibri" pitchFamily="34" charset="-122"/>
@@ -2350,7 +2330,7 @@
       </p:sp>
       <p:sp>
         <p:nvSpPr>
-          <p:cNvPr id="5" name="Text 3"/>
+          <p:cNvPr id="4" name="Text 2"/>
           <p:cNvSpPr/>
           <p:nvPr/>
         </p:nvSpPr>
@@ -2375,7 +2355,7 @@
             <a:r>
               <a:rPr lang="en-US" sz="1500" dirty="0">
                 <a:solidFill>
-                  <a:srgbClr val="93ABA0"/>
+                  <a:srgbClr val="55677A"/>
                 </a:solidFill>
                 <a:latin typeface="Calibri" pitchFamily="34" charset="0"/>
                 <a:ea typeface="Calibri" pitchFamily="34" charset="-122"/>
@@ -2392,7 +2372,7 @@
             <a:r>
               <a:rPr lang="en-US" sz="1500" dirty="0">
                 <a:solidFill>
-                  <a:srgbClr val="93ABA0"/>
+                  <a:srgbClr val="55677A"/>
                 </a:solidFill>
                 <a:latin typeface="Calibri" pitchFamily="34" charset="0"/>
                 <a:ea typeface="Calibri" pitchFamily="34" charset="-122"/>
@@ -2406,7 +2386,7 @@
       </p:sp>
       <p:sp>
         <p:nvSpPr>
-          <p:cNvPr id="6" name="Text 4"/>
+          <p:cNvPr id="5" name="Text 3"/>
           <p:cNvSpPr/>
           <p:nvPr/>
         </p:nvSpPr>
@@ -2431,7 +2411,7 @@
             <a:r>
               <a:rPr lang="en-US" sz="3000" b="1" dirty="0">
                 <a:solidFill>
-                  <a:srgbClr val="E6F2EA"/>
+                  <a:srgbClr val="13202E"/>
                 </a:solidFill>
                 <a:latin typeface="Calibri" pitchFamily="34" charset="0"/>
                 <a:ea typeface="Calibri" pitchFamily="34" charset="-122"/>
@@ -2445,7 +2425,7 @@
       </p:sp>
       <p:sp>
         <p:nvSpPr>
-          <p:cNvPr id="7" name="Text 5"/>
+          <p:cNvPr id="6" name="Text 4"/>
           <p:cNvSpPr/>
           <p:nvPr/>
         </p:nvSpPr>
@@ -2470,7 +2450,7 @@
             <a:r>
               <a:rPr lang="en-US" sz="1000" b="1" spc="200" kern="0" dirty="0">
                 <a:solidFill>
-                  <a:srgbClr val="2ADF8F"/>
+                  <a:srgbClr val="147A3D"/>
                 </a:solidFill>
                 <a:latin typeface="Calibri" pitchFamily="34" charset="0"/>
                 <a:ea typeface="Calibri" pitchFamily="34" charset="-122"/>
@@ -2484,7 +2464,7 @@
       </p:sp>
       <p:sp>
         <p:nvSpPr>
-          <p:cNvPr id="8" name="Text 6"/>
+          <p:cNvPr id="7" name="Text 5"/>
           <p:cNvSpPr/>
           <p:nvPr/>
         </p:nvSpPr>
@@ -2509,7 +2489,7 @@
             <a:r>
               <a:rPr lang="en-US" sz="3000" b="1" dirty="0">
                 <a:solidFill>
-                  <a:srgbClr val="E6F2EA"/>
+                  <a:srgbClr val="13202E"/>
                 </a:solidFill>
                 <a:latin typeface="Calibri" pitchFamily="34" charset="0"/>
                 <a:ea typeface="Calibri" pitchFamily="34" charset="-122"/>
@@ -2523,7 +2503,7 @@
       </p:sp>
       <p:sp>
         <p:nvSpPr>
-          <p:cNvPr id="9" name="Text 7"/>
+          <p:cNvPr id="8" name="Text 6"/>
           <p:cNvSpPr/>
           <p:nvPr/>
         </p:nvSpPr>
@@ -2548,7 +2528,7 @@
             <a:r>
               <a:rPr lang="en-US" sz="1000" b="1" spc="200" kern="0" dirty="0">
                 <a:solidFill>
-                  <a:srgbClr val="2ADF8F"/>
+                  <a:srgbClr val="147A3D"/>
                 </a:solidFill>
                 <a:latin typeface="Calibri" pitchFamily="34" charset="0"/>
                 <a:ea typeface="Calibri" pitchFamily="34" charset="-122"/>
@@ -2562,7 +2542,7 @@
       </p:sp>
       <p:sp>
         <p:nvSpPr>
-          <p:cNvPr id="10" name="Text 8"/>
+          <p:cNvPr id="9" name="Text 7"/>
           <p:cNvSpPr/>
           <p:nvPr/>
         </p:nvSpPr>
@@ -2587,7 +2567,7 @@
             <a:r>
               <a:rPr lang="en-US" sz="3000" b="1" dirty="0">
                 <a:solidFill>
-                  <a:srgbClr val="E6F2EA"/>
+                  <a:srgbClr val="13202E"/>
                 </a:solidFill>
                 <a:latin typeface="Calibri" pitchFamily="34" charset="0"/>
                 <a:ea typeface="Calibri" pitchFamily="34" charset="-122"/>
@@ -2601,7 +2581,7 @@
       </p:sp>
       <p:sp>
         <p:nvSpPr>
-          <p:cNvPr id="11" name="Text 9"/>
+          <p:cNvPr id="10" name="Text 8"/>
           <p:cNvSpPr/>
           <p:nvPr/>
         </p:nvSpPr>
@@ -2626,7 +2606,7 @@
             <a:r>
               <a:rPr lang="en-US" sz="1000" b="1" spc="200" kern="0" dirty="0">
                 <a:solidFill>
-                  <a:srgbClr val="2ADF8F"/>
+                  <a:srgbClr val="147A3D"/>
                 </a:solidFill>
                 <a:latin typeface="Calibri" pitchFamily="34" charset="0"/>
                 <a:ea typeface="Calibri" pitchFamily="34" charset="-122"/>
@@ -2640,7 +2620,7 @@
       </p:sp>
       <p:sp>
         <p:nvSpPr>
-          <p:cNvPr id="12" name="Text 10"/>
+          <p:cNvPr id="11" name="Text 9"/>
           <p:cNvSpPr/>
           <p:nvPr/>
         </p:nvSpPr>
@@ -2665,7 +2645,7 @@
             <a:r>
               <a:rPr lang="en-US" sz="3000" b="1" dirty="0">
                 <a:solidFill>
-                  <a:srgbClr val="E6F2EA"/>
+                  <a:srgbClr val="13202E"/>
                 </a:solidFill>
                 <a:latin typeface="Calibri" pitchFamily="34" charset="0"/>
                 <a:ea typeface="Calibri" pitchFamily="34" charset="-122"/>
@@ -2679,7 +2659,7 @@
       </p:sp>
       <p:sp>
         <p:nvSpPr>
-          <p:cNvPr id="13" name="Text 11"/>
+          <p:cNvPr id="12" name="Text 10"/>
           <p:cNvSpPr/>
           <p:nvPr/>
         </p:nvSpPr>
@@ -2704,7 +2684,7 @@
             <a:r>
               <a:rPr lang="en-US" sz="1000" b="1" spc="200" kern="0" dirty="0">
                 <a:solidFill>
-                  <a:srgbClr val="2ADF8F"/>
+                  <a:srgbClr val="147A3D"/>
                 </a:solidFill>
                 <a:latin typeface="Calibri" pitchFamily="34" charset="0"/>
                 <a:ea typeface="Calibri" pitchFamily="34" charset="-122"/>
@@ -2730,7 +2710,7 @@
     <p:bg>
       <p:bgPr>
         <a:solidFill>
-          <a:srgbClr val="05090D"/>
+          <a:srgbClr val="FFFFFF"/>
         </a:solidFill>
       </p:bgPr>
     </p:bg>
@@ -2775,7 +2755,7 @@
             <a:r>
               <a:rPr lang="en-US" sz="1100" b="1" spc="300" kern="0" dirty="0">
                 <a:solidFill>
-                  <a:srgbClr val="2ADF8F"/>
+                  <a:srgbClr val="147A3D"/>
                 </a:solidFill>
                 <a:latin typeface="Calibri" pitchFamily="34" charset="0"/>
                 <a:ea typeface="Calibri" pitchFamily="34" charset="-122"/>
@@ -2814,7 +2794,7 @@
             <a:r>
               <a:rPr lang="en-US" sz="3000" b="1" dirty="0">
                 <a:solidFill>
-                  <a:srgbClr val="E6F2EA"/>
+                  <a:srgbClr val="13202E"/>
                 </a:solidFill>
                 <a:latin typeface="Calibri" pitchFamily="34" charset="0"/>
                 <a:ea typeface="Calibri" pitchFamily="34" charset="-122"/>
@@ -2857,7 +2837,7 @@
             <a:r>
               <a:rPr lang="en-US" sz="1400" dirty="0">
                 <a:solidFill>
-                  <a:srgbClr val="E6F2EA"/>
+                  <a:srgbClr val="13202E"/>
                 </a:solidFill>
                 <a:latin typeface="Calibri" pitchFamily="34" charset="0"/>
                 <a:ea typeface="Calibri" pitchFamily="34" charset="-122"/>
@@ -2878,7 +2858,7 @@
             <a:r>
               <a:rPr lang="en-US" sz="1400" dirty="0">
                 <a:solidFill>
-                  <a:srgbClr val="E6F2EA"/>
+                  <a:srgbClr val="13202E"/>
                 </a:solidFill>
                 <a:latin typeface="Calibri" pitchFamily="34" charset="0"/>
                 <a:ea typeface="Calibri" pitchFamily="34" charset="-122"/>
@@ -2899,7 +2879,7 @@
             <a:r>
               <a:rPr lang="en-US" sz="1400" dirty="0">
                 <a:solidFill>
-                  <a:srgbClr val="E6F2EA"/>
+                  <a:srgbClr val="13202E"/>
                 </a:solidFill>
                 <a:latin typeface="Calibri" pitchFamily="34" charset="0"/>
                 <a:ea typeface="Calibri" pitchFamily="34" charset="-122"/>
@@ -2920,7 +2900,7 @@
             <a:r>
               <a:rPr lang="en-US" sz="1400" dirty="0">
                 <a:solidFill>
-                  <a:srgbClr val="E6F2EA"/>
+                  <a:srgbClr val="13202E"/>
                 </a:solidFill>
                 <a:latin typeface="Calibri" pitchFamily="34" charset="0"/>
                 <a:ea typeface="Calibri" pitchFamily="34" charset="-122"/>
@@ -2949,11 +2929,11 @@
             </a:avLst>
           </a:prstGeom>
           <a:solidFill>
-            <a:srgbClr val="0D1520"/>
+            <a:srgbClr val="F5F7F9"/>
           </a:solidFill>
           <a:ln w="12700">
             <a:solidFill>
-              <a:srgbClr val="1E2D33"/>
+              <a:srgbClr val="DCE3EB"/>
             </a:solidFill>
             <a:prstDash val="solid"/>
           </a:ln>
@@ -2986,7 +2966,7 @@
             <a:r>
               <a:rPr lang="en-US" sz="1050" b="1" spc="200" kern="0" dirty="0">
                 <a:solidFill>
-                  <a:srgbClr val="93ABA0"/>
+                  <a:srgbClr val="55677A"/>
                 </a:solidFill>
                 <a:latin typeface="Calibri" pitchFamily="34" charset="0"/>
                 <a:ea typeface="Calibri" pitchFamily="34" charset="-122"/>
@@ -3025,7 +3005,7 @@
             <a:r>
               <a:rPr lang="en-US" sz="1600" b="1" dirty="0">
                 <a:solidFill>
-                  <a:srgbClr val="E6F2EA"/>
+                  <a:srgbClr val="13202E"/>
                 </a:solidFill>
                 <a:latin typeface="Calibri" pitchFamily="34" charset="0"/>
                 <a:ea typeface="Calibri" pitchFamily="34" charset="-122"/>
@@ -3042,7 +3022,7 @@
             <a:r>
               <a:rPr lang="en-US" sz="1600" b="1" dirty="0">
                 <a:solidFill>
-                  <a:srgbClr val="E6F2EA"/>
+                  <a:srgbClr val="13202E"/>
                 </a:solidFill>
                 <a:latin typeface="Calibri" pitchFamily="34" charset="0"/>
                 <a:ea typeface="Calibri" pitchFamily="34" charset="-122"/>
@@ -3081,7 +3061,7 @@
             <a:r>
               <a:rPr lang="en-US" sz="1250" dirty="0">
                 <a:solidFill>
-                  <a:srgbClr val="2ADF8F"/>
+                  <a:srgbClr val="147A3D"/>
                 </a:solidFill>
                 <a:latin typeface="Calibri" pitchFamily="34" charset="0"/>
                 <a:ea typeface="Calibri" pitchFamily="34" charset="-122"/>
@@ -3120,7 +3100,7 @@
             <a:r>
               <a:rPr lang="en-US" sz="900" dirty="0">
                 <a:solidFill>
-                  <a:srgbClr val="93ABA0"/>
+                  <a:srgbClr val="55677A"/>
                 </a:solidFill>
                 <a:latin typeface="Calibri" pitchFamily="34" charset="0"/>
                 <a:ea typeface="Calibri" pitchFamily="34" charset="-122"/>
@@ -3159,7 +3139,7 @@
             <a:r>
               <a:rPr lang="en-US" sz="900" dirty="0">
                 <a:solidFill>
-                  <a:srgbClr val="93ABA0"/>
+                  <a:srgbClr val="55677A"/>
                 </a:solidFill>
                 <a:latin typeface="Calibri" pitchFamily="34" charset="0"/>
                 <a:ea typeface="Calibri" pitchFamily="34" charset="-122"/>
@@ -3185,7 +3165,7 @@
     <p:bg>
       <p:bgPr>
         <a:solidFill>
-          <a:srgbClr val="05090D"/>
+          <a:srgbClr val="FFFFFF"/>
         </a:solidFill>
       </p:bgPr>
     </p:bg>
@@ -3230,7 +3210,7 @@
             <a:r>
               <a:rPr lang="en-US" sz="1100" b="1" spc="300" kern="0" dirty="0">
                 <a:solidFill>
-                  <a:srgbClr val="2ADF8F"/>
+                  <a:srgbClr val="147A3D"/>
                 </a:solidFill>
                 <a:latin typeface="Calibri" pitchFamily="34" charset="0"/>
                 <a:ea typeface="Calibri" pitchFamily="34" charset="-122"/>
@@ -3269,7 +3249,7 @@
             <a:r>
               <a:rPr lang="en-US" sz="3000" b="1" dirty="0">
                 <a:solidFill>
-                  <a:srgbClr val="E6F2EA"/>
+                  <a:srgbClr val="13202E"/>
                 </a:solidFill>
                 <a:latin typeface="Calibri" pitchFamily="34" charset="0"/>
                 <a:ea typeface="Calibri" pitchFamily="34" charset="-122"/>
@@ -3312,7 +3292,7 @@
             <a:r>
               <a:rPr lang="en-US" sz="1400" dirty="0">
                 <a:solidFill>
-                  <a:srgbClr val="E6F2EA"/>
+                  <a:srgbClr val="13202E"/>
                 </a:solidFill>
                 <a:latin typeface="Calibri" pitchFamily="34" charset="0"/>
                 <a:ea typeface="Calibri" pitchFamily="34" charset="-122"/>
@@ -3333,7 +3313,7 @@
             <a:r>
               <a:rPr lang="en-US" sz="1400" dirty="0">
                 <a:solidFill>
-                  <a:srgbClr val="E6F2EA"/>
+                  <a:srgbClr val="13202E"/>
                 </a:solidFill>
                 <a:latin typeface="Calibri" pitchFamily="34" charset="0"/>
                 <a:ea typeface="Calibri" pitchFamily="34" charset="-122"/>
@@ -3354,7 +3334,7 @@
             <a:r>
               <a:rPr lang="en-US" sz="1400" dirty="0">
                 <a:solidFill>
-                  <a:srgbClr val="E6F2EA"/>
+                  <a:srgbClr val="13202E"/>
                 </a:solidFill>
                 <a:latin typeface="Calibri" pitchFamily="34" charset="0"/>
                 <a:ea typeface="Calibri" pitchFamily="34" charset="-122"/>
@@ -3375,7 +3355,7 @@
             <a:r>
               <a:rPr lang="en-US" sz="1400" dirty="0">
                 <a:solidFill>
-                  <a:srgbClr val="E6F2EA"/>
+                  <a:srgbClr val="13202E"/>
                 </a:solidFill>
                 <a:latin typeface="Calibri" pitchFamily="34" charset="0"/>
                 <a:ea typeface="Calibri" pitchFamily="34" charset="-122"/>
@@ -3404,11 +3384,11 @@
             </a:avLst>
           </a:prstGeom>
           <a:solidFill>
-            <a:srgbClr val="0D1520"/>
+            <a:srgbClr val="0B1611"/>
           </a:solidFill>
           <a:ln w="12700">
             <a:solidFill>
-              <a:srgbClr val="1E2D33"/>
+              <a:srgbClr val="1D3A2B"/>
             </a:solidFill>
             <a:prstDash val="solid"/>
           </a:ln>
@@ -3441,7 +3421,7 @@
             <a:r>
               <a:rPr lang="en-US" sz="1300" b="1" dirty="0">
                 <a:solidFill>
-                  <a:srgbClr val="D4A72C"/>
+                  <a:srgbClr val="EFD07E"/>
                 </a:solidFill>
                 <a:latin typeface="Calibri" pitchFamily="34" charset="0"/>
                 <a:ea typeface="Calibri" pitchFamily="34" charset="-122"/>
@@ -3573,8 +3553,8 @@
         </p:nvSpPr>
         <p:spPr>
           <a:xfrm>
-            <a:off x="6967728" y="4114800"/>
-            <a:ext cx="4480560" cy="548640"/>
+            <a:off x="6967728" y="4206240"/>
+            <a:ext cx="4480560" cy="822960"/>
           </a:xfrm>
           <a:prstGeom prst="rect">
             <a:avLst/>
@@ -3631,7 +3611,7 @@
             <a:r>
               <a:rPr lang="en-US" sz="900" dirty="0">
                 <a:solidFill>
-                  <a:srgbClr val="93ABA0"/>
+                  <a:srgbClr val="55677A"/>
                 </a:solidFill>
                 <a:latin typeface="Calibri" pitchFamily="34" charset="0"/>
                 <a:ea typeface="Calibri" pitchFamily="34" charset="-122"/>
@@ -3670,7 +3650,7 @@
             <a:r>
               <a:rPr lang="en-US" sz="900" dirty="0">
                 <a:solidFill>
-                  <a:srgbClr val="93ABA0"/>
+                  <a:srgbClr val="55677A"/>
                 </a:solidFill>
                 <a:latin typeface="Calibri" pitchFamily="34" charset="0"/>
                 <a:ea typeface="Calibri" pitchFamily="34" charset="-122"/>
@@ -3696,7 +3676,7 @@
     <p:bg>
       <p:bgPr>
         <a:solidFill>
-          <a:srgbClr val="05090D"/>
+          <a:srgbClr val="FFFFFF"/>
         </a:solidFill>
       </p:bgPr>
     </p:bg>
@@ -3741,7 +3721,7 @@
             <a:r>
               <a:rPr lang="en-US" sz="1100" b="1" spc="300" kern="0" dirty="0">
                 <a:solidFill>
-                  <a:srgbClr val="2ADF8F"/>
+                  <a:srgbClr val="147A3D"/>
                 </a:solidFill>
                 <a:latin typeface="Calibri" pitchFamily="34" charset="0"/>
                 <a:ea typeface="Calibri" pitchFamily="34" charset="-122"/>
@@ -3780,7 +3760,7 @@
             <a:r>
               <a:rPr lang="en-US" sz="3000" b="1" dirty="0">
                 <a:solidFill>
-                  <a:srgbClr val="E6F2EA"/>
+                  <a:srgbClr val="13202E"/>
                 </a:solidFill>
                 <a:latin typeface="Calibri" pitchFamily="34" charset="0"/>
                 <a:ea typeface="Calibri" pitchFamily="34" charset="-122"/>
@@ -3809,11 +3789,11 @@
             </a:avLst>
           </a:prstGeom>
           <a:solidFill>
-            <a:srgbClr val="0D1520"/>
+            <a:srgbClr val="F5F7F9"/>
           </a:solidFill>
           <a:ln w="12700">
             <a:solidFill>
-              <a:srgbClr val="1E2D33"/>
+              <a:srgbClr val="DCE3EB"/>
             </a:solidFill>
             <a:prstDash val="solid"/>
           </a:ln>
@@ -3882,7 +3862,7 @@
             <a:r>
               <a:rPr lang="en-US" sz="1350" b="1" dirty="0">
                 <a:solidFill>
-                  <a:srgbClr val="2ADF8F"/>
+                  <a:srgbClr val="147A3D"/>
                 </a:solidFill>
                 <a:latin typeface="Calibri" pitchFamily="34" charset="0"/>
                 <a:ea typeface="Calibri" pitchFamily="34" charset="-122"/>
@@ -3921,7 +3901,7 @@
             <a:r>
               <a:rPr lang="en-US" sz="1100" dirty="0">
                 <a:solidFill>
-                  <a:srgbClr val="93ABA0"/>
+                  <a:srgbClr val="55677A"/>
                 </a:solidFill>
                 <a:latin typeface="Calibri" pitchFamily="34" charset="0"/>
                 <a:ea typeface="Calibri" pitchFamily="34" charset="-122"/>
@@ -3950,11 +3930,11 @@
             </a:avLst>
           </a:prstGeom>
           <a:solidFill>
-            <a:srgbClr val="0D1520"/>
+            <a:srgbClr val="F5F7F9"/>
           </a:solidFill>
           <a:ln w="12700">
             <a:solidFill>
-              <a:srgbClr val="1E2D33"/>
+              <a:srgbClr val="DCE3EB"/>
             </a:solidFill>
             <a:prstDash val="solid"/>
           </a:ln>
@@ -4023,7 +4003,7 @@
             <a:r>
               <a:rPr lang="en-US" sz="1350" b="1" dirty="0">
                 <a:solidFill>
-                  <a:srgbClr val="D4A72C"/>
+                  <a:srgbClr val="8F6400"/>
                 </a:solidFill>
                 <a:latin typeface="Calibri" pitchFamily="34" charset="0"/>
                 <a:ea typeface="Calibri" pitchFamily="34" charset="-122"/>
@@ -4062,7 +4042,7 @@
             <a:r>
               <a:rPr lang="en-US" sz="1100" dirty="0">
                 <a:solidFill>
-                  <a:srgbClr val="93ABA0"/>
+                  <a:srgbClr val="55677A"/>
                 </a:solidFill>
                 <a:latin typeface="Calibri" pitchFamily="34" charset="0"/>
                 <a:ea typeface="Calibri" pitchFamily="34" charset="-122"/>
@@ -4091,11 +4071,11 @@
             </a:avLst>
           </a:prstGeom>
           <a:solidFill>
-            <a:srgbClr val="0D1520"/>
+            <a:srgbClr val="F5F7F9"/>
           </a:solidFill>
           <a:ln w="12700">
             <a:solidFill>
-              <a:srgbClr val="1E2D33"/>
+              <a:srgbClr val="DCE3EB"/>
             </a:solidFill>
             <a:prstDash val="solid"/>
           </a:ln>
@@ -4164,7 +4144,7 @@
             <a:r>
               <a:rPr lang="en-US" sz="1350" b="1" dirty="0">
                 <a:solidFill>
-                  <a:srgbClr val="58A6FF"/>
+                  <a:srgbClr val="1D63D8"/>
                 </a:solidFill>
                 <a:latin typeface="Calibri" pitchFamily="34" charset="0"/>
                 <a:ea typeface="Calibri" pitchFamily="34" charset="-122"/>
@@ -4203,7 +4183,7 @@
             <a:r>
               <a:rPr lang="en-US" sz="1100" dirty="0">
                 <a:solidFill>
-                  <a:srgbClr val="93ABA0"/>
+                  <a:srgbClr val="55677A"/>
                 </a:solidFill>
                 <a:latin typeface="Calibri" pitchFamily="34" charset="0"/>
                 <a:ea typeface="Calibri" pitchFamily="34" charset="-122"/>
@@ -4242,7 +4222,7 @@
             <a:r>
               <a:rPr lang="en-US" sz="1150" i="1" dirty="0">
                 <a:solidFill>
-                  <a:srgbClr val="2ADF8F"/>
+                  <a:srgbClr val="147A3D"/>
                 </a:solidFill>
                 <a:latin typeface="Calibri" pitchFamily="34" charset="0"/>
                 <a:ea typeface="Calibri" pitchFamily="34" charset="-122"/>
@@ -4281,7 +4261,7 @@
             <a:r>
               <a:rPr lang="en-US" sz="900" dirty="0">
                 <a:solidFill>
-                  <a:srgbClr val="93ABA0"/>
+                  <a:srgbClr val="55677A"/>
                 </a:solidFill>
                 <a:latin typeface="Calibri" pitchFamily="34" charset="0"/>
                 <a:ea typeface="Calibri" pitchFamily="34" charset="-122"/>
@@ -4320,7 +4300,7 @@
             <a:r>
               <a:rPr lang="en-US" sz="900" dirty="0">
                 <a:solidFill>
-                  <a:srgbClr val="93ABA0"/>
+                  <a:srgbClr val="55677A"/>
                 </a:solidFill>
                 <a:latin typeface="Calibri" pitchFamily="34" charset="0"/>
                 <a:ea typeface="Calibri" pitchFamily="34" charset="-122"/>
@@ -4346,7 +4326,7 @@
     <p:bg>
       <p:bgPr>
         <a:solidFill>
-          <a:srgbClr val="05090D"/>
+          <a:srgbClr val="FFFFFF"/>
         </a:solidFill>
       </p:bgPr>
     </p:bg>
@@ -4391,7 +4371,7 @@
             <a:r>
               <a:rPr lang="en-US" sz="1100" b="1" spc="300" kern="0" dirty="0">
                 <a:solidFill>
-                  <a:srgbClr val="2ADF8F"/>
+                  <a:srgbClr val="147A3D"/>
                 </a:solidFill>
                 <a:latin typeface="Calibri" pitchFamily="34" charset="0"/>
                 <a:ea typeface="Calibri" pitchFamily="34" charset="-122"/>
@@ -4430,7 +4410,7 @@
             <a:r>
               <a:rPr lang="en-US" sz="3000" b="1" dirty="0">
                 <a:solidFill>
-                  <a:srgbClr val="E6F2EA"/>
+                  <a:srgbClr val="13202E"/>
                 </a:solidFill>
                 <a:latin typeface="Calibri" pitchFamily="34" charset="0"/>
                 <a:ea typeface="Calibri" pitchFamily="34" charset="-122"/>
@@ -4473,7 +4453,7 @@
             <a:r>
               <a:rPr lang="en-US" sz="1400" dirty="0">
                 <a:solidFill>
-                  <a:srgbClr val="E6F2EA"/>
+                  <a:srgbClr val="13202E"/>
                 </a:solidFill>
                 <a:latin typeface="Calibri" pitchFamily="34" charset="0"/>
                 <a:ea typeface="Calibri" pitchFamily="34" charset="-122"/>
@@ -4494,13 +4474,13 @@
             <a:r>
               <a:rPr lang="en-US" sz="1400" dirty="0">
                 <a:solidFill>
-                  <a:srgbClr val="E6F2EA"/>
-                </a:solidFill>
-                <a:latin typeface="Calibri" pitchFamily="34" charset="0"/>
-                <a:ea typeface="Calibri" pitchFamily="34" charset="-122"/>
-                <a:cs typeface="Calibri" pitchFamily="34" charset="-120"/>
-              </a:rPr>
-              <a:t>Notifications arrive as compact, expandable lines — new reports, alerts, rulebook changes.</a:t>
+                  <a:srgbClr val="13202E"/>
+                </a:solidFill>
+                <a:latin typeface="Calibri" pitchFamily="34" charset="0"/>
+                <a:ea typeface="Calibri" pitchFamily="34" charset="-122"/>
+                <a:cs typeface="Calibri" pitchFamily="34" charset="-120"/>
+              </a:rPr>
+              <a:t>Notifications live on their own page — grouped by day, one line per message, expandable — with an unread badge in the top menu.</a:t>
             </a:r>
             <a:endParaRPr lang="en-US" sz="1400" dirty="0"/>
           </a:p>
@@ -4515,7 +4495,7 @@
             <a:r>
               <a:rPr lang="en-US" sz="1400" dirty="0">
                 <a:solidFill>
-                  <a:srgbClr val="E6F2EA"/>
+                  <a:srgbClr val="13202E"/>
                 </a:solidFill>
                 <a:latin typeface="Calibri" pitchFamily="34" charset="0"/>
                 <a:ea typeface="Calibri" pitchFamily="34" charset="-122"/>
@@ -4536,7 +4516,7 @@
             <a:r>
               <a:rPr lang="en-US" sz="1400" dirty="0">
                 <a:solidFill>
-                  <a:srgbClr val="E6F2EA"/>
+                  <a:srgbClr val="13202E"/>
                 </a:solidFill>
                 <a:latin typeface="Calibri" pitchFamily="34" charset="0"/>
                 <a:ea typeface="Calibri" pitchFamily="34" charset="-122"/>
@@ -4565,11 +4545,11 @@
             </a:avLst>
           </a:prstGeom>
           <a:solidFill>
-            <a:srgbClr val="0D1520"/>
+            <a:srgbClr val="F5F7F9"/>
           </a:solidFill>
           <a:ln w="12700">
             <a:solidFill>
-              <a:srgbClr val="1E2D33"/>
+              <a:srgbClr val="DCE3EB"/>
             </a:solidFill>
             <a:prstDash val="solid"/>
           </a:ln>
@@ -4602,7 +4582,7 @@
             <a:r>
               <a:rPr lang="en-US" sz="1050" b="1" spc="200" kern="0" dirty="0">
                 <a:solidFill>
-                  <a:srgbClr val="93ABA0"/>
+                  <a:srgbClr val="55677A"/>
                 </a:solidFill>
                 <a:latin typeface="Calibri" pitchFamily="34" charset="0"/>
                 <a:ea typeface="Calibri" pitchFamily="34" charset="-122"/>
@@ -4641,7 +4621,7 @@
             <a:r>
               <a:rPr lang="en-US" sz="1400" i="1" dirty="0">
                 <a:solidFill>
-                  <a:srgbClr val="E6F2EA"/>
+                  <a:srgbClr val="13202E"/>
                 </a:solidFill>
                 <a:latin typeface="Calibri" pitchFamily="34" charset="0"/>
                 <a:ea typeface="Calibri" pitchFamily="34" charset="-122"/>
@@ -4664,7 +4644,7 @@
             <a:r>
               <a:rPr lang="en-US" sz="1400" i="1" dirty="0">
                 <a:solidFill>
-                  <a:srgbClr val="E6F2EA"/>
+                  <a:srgbClr val="13202E"/>
                 </a:solidFill>
                 <a:latin typeface="Calibri" pitchFamily="34" charset="0"/>
                 <a:ea typeface="Calibri" pitchFamily="34" charset="-122"/>
@@ -4703,7 +4683,7 @@
             <a:r>
               <a:rPr lang="en-US" sz="900" dirty="0">
                 <a:solidFill>
-                  <a:srgbClr val="93ABA0"/>
+                  <a:srgbClr val="55677A"/>
                 </a:solidFill>
                 <a:latin typeface="Calibri" pitchFamily="34" charset="0"/>
                 <a:ea typeface="Calibri" pitchFamily="34" charset="-122"/>
@@ -4742,7 +4722,7 @@
             <a:r>
               <a:rPr lang="en-US" sz="900" dirty="0">
                 <a:solidFill>
-                  <a:srgbClr val="93ABA0"/>
+                  <a:srgbClr val="55677A"/>
                 </a:solidFill>
                 <a:latin typeface="Calibri" pitchFamily="34" charset="0"/>
                 <a:ea typeface="Calibri" pitchFamily="34" charset="-122"/>
@@ -4768,7 +4748,7 @@
     <p:bg>
       <p:bgPr>
         <a:solidFill>
-          <a:srgbClr val="05090D"/>
+          <a:srgbClr val="FFFFFF"/>
         </a:solidFill>
       </p:bgPr>
     </p:bg>
@@ -4813,7 +4793,7 @@
             <a:r>
               <a:rPr lang="en-US" sz="1100" b="1" spc="300" kern="0" dirty="0">
                 <a:solidFill>
-                  <a:srgbClr val="2ADF8F"/>
+                  <a:srgbClr val="147A3D"/>
                 </a:solidFill>
                 <a:latin typeface="Calibri" pitchFamily="34" charset="0"/>
                 <a:ea typeface="Calibri" pitchFamily="34" charset="-122"/>
@@ -4852,7 +4832,7 @@
             <a:r>
               <a:rPr lang="en-US" sz="3000" b="1" dirty="0">
                 <a:solidFill>
-                  <a:srgbClr val="E6F2EA"/>
+                  <a:srgbClr val="13202E"/>
                 </a:solidFill>
                 <a:latin typeface="Calibri" pitchFamily="34" charset="0"/>
                 <a:ea typeface="Calibri" pitchFamily="34" charset="-122"/>
@@ -4881,11 +4861,11 @@
             </a:avLst>
           </a:prstGeom>
           <a:solidFill>
-            <a:srgbClr val="0D1520"/>
+            <a:srgbClr val="F5F7F9"/>
           </a:solidFill>
           <a:ln w="12700">
             <a:solidFill>
-              <a:srgbClr val="1E2D33"/>
+              <a:srgbClr val="DCE3EB"/>
             </a:solidFill>
             <a:prstDash val="solid"/>
           </a:ln>
@@ -4918,7 +4898,7 @@
             <a:r>
               <a:rPr lang="en-US" sz="1350" b="1" dirty="0">
                 <a:solidFill>
-                  <a:srgbClr val="2ADF8F"/>
+                  <a:srgbClr val="147A3D"/>
                 </a:solidFill>
                 <a:latin typeface="Calibri" pitchFamily="34" charset="0"/>
                 <a:ea typeface="Calibri" pitchFamily="34" charset="-122"/>
@@ -4957,7 +4937,7 @@
             <a:r>
               <a:rPr lang="en-US" sz="1050" dirty="0">
                 <a:solidFill>
-                  <a:srgbClr val="93ABA0"/>
+                  <a:srgbClr val="55677A"/>
                 </a:solidFill>
                 <a:latin typeface="Calibri" pitchFamily="34" charset="0"/>
                 <a:ea typeface="Calibri" pitchFamily="34" charset="-122"/>
@@ -4986,11 +4966,11 @@
             </a:avLst>
           </a:prstGeom>
           <a:solidFill>
-            <a:srgbClr val="0D1520"/>
+            <a:srgbClr val="F5F7F9"/>
           </a:solidFill>
           <a:ln w="12700">
             <a:solidFill>
-              <a:srgbClr val="1E2D33"/>
+              <a:srgbClr val="DCE3EB"/>
             </a:solidFill>
             <a:prstDash val="solid"/>
           </a:ln>
@@ -5023,7 +5003,7 @@
             <a:r>
               <a:rPr lang="en-US" sz="1350" b="1" dirty="0">
                 <a:solidFill>
-                  <a:srgbClr val="2ADF8F"/>
+                  <a:srgbClr val="147A3D"/>
                 </a:solidFill>
                 <a:latin typeface="Calibri" pitchFamily="34" charset="0"/>
                 <a:ea typeface="Calibri" pitchFamily="34" charset="-122"/>
@@ -5062,7 +5042,7 @@
             <a:r>
               <a:rPr lang="en-US" sz="1050" dirty="0">
                 <a:solidFill>
-                  <a:srgbClr val="93ABA0"/>
+                  <a:srgbClr val="55677A"/>
                 </a:solidFill>
                 <a:latin typeface="Calibri" pitchFamily="34" charset="0"/>
                 <a:ea typeface="Calibri" pitchFamily="34" charset="-122"/>
@@ -5091,11 +5071,11 @@
             </a:avLst>
           </a:prstGeom>
           <a:solidFill>
-            <a:srgbClr val="0D1520"/>
+            <a:srgbClr val="F5F7F9"/>
           </a:solidFill>
           <a:ln w="12700">
             <a:solidFill>
-              <a:srgbClr val="1E2D33"/>
+              <a:srgbClr val="DCE3EB"/>
             </a:solidFill>
             <a:prstDash val="solid"/>
           </a:ln>
@@ -5128,7 +5108,7 @@
             <a:r>
               <a:rPr lang="en-US" sz="1350" b="1" dirty="0">
                 <a:solidFill>
-                  <a:srgbClr val="2ADF8F"/>
+                  <a:srgbClr val="147A3D"/>
                 </a:solidFill>
                 <a:latin typeface="Calibri" pitchFamily="34" charset="0"/>
                 <a:ea typeface="Calibri" pitchFamily="34" charset="-122"/>
@@ -5167,7 +5147,7 @@
             <a:r>
               <a:rPr lang="en-US" sz="1050" dirty="0">
                 <a:solidFill>
-                  <a:srgbClr val="93ABA0"/>
+                  <a:srgbClr val="55677A"/>
                 </a:solidFill>
                 <a:latin typeface="Calibri" pitchFamily="34" charset="0"/>
                 <a:ea typeface="Calibri" pitchFamily="34" charset="-122"/>
@@ -5196,11 +5176,11 @@
             </a:avLst>
           </a:prstGeom>
           <a:solidFill>
-            <a:srgbClr val="0D1520"/>
+            <a:srgbClr val="F5F7F9"/>
           </a:solidFill>
           <a:ln w="12700">
             <a:solidFill>
-              <a:srgbClr val="1E2D33"/>
+              <a:srgbClr val="DCE3EB"/>
             </a:solidFill>
             <a:prstDash val="solid"/>
           </a:ln>
@@ -5233,7 +5213,7 @@
             <a:r>
               <a:rPr lang="en-US" sz="1350" b="1" dirty="0">
                 <a:solidFill>
-                  <a:srgbClr val="2ADF8F"/>
+                  <a:srgbClr val="147A3D"/>
                 </a:solidFill>
                 <a:latin typeface="Calibri" pitchFamily="34" charset="0"/>
                 <a:ea typeface="Calibri" pitchFamily="34" charset="-122"/>
@@ -5272,7 +5252,7 @@
             <a:r>
               <a:rPr lang="en-US" sz="1050" dirty="0">
                 <a:solidFill>
-                  <a:srgbClr val="93ABA0"/>
+                  <a:srgbClr val="55677A"/>
                 </a:solidFill>
                 <a:latin typeface="Calibri" pitchFamily="34" charset="0"/>
                 <a:ea typeface="Calibri" pitchFamily="34" charset="-122"/>
@@ -5301,11 +5281,11 @@
             </a:avLst>
           </a:prstGeom>
           <a:solidFill>
-            <a:srgbClr val="0D1520"/>
+            <a:srgbClr val="F5F7F9"/>
           </a:solidFill>
           <a:ln w="12700">
             <a:solidFill>
-              <a:srgbClr val="1E2D33"/>
+              <a:srgbClr val="DCE3EB"/>
             </a:solidFill>
             <a:prstDash val="solid"/>
           </a:ln>
@@ -5338,7 +5318,7 @@
             <a:r>
               <a:rPr lang="en-US" sz="1350" b="1" dirty="0">
                 <a:solidFill>
-                  <a:srgbClr val="2ADF8F"/>
+                  <a:srgbClr val="147A3D"/>
                 </a:solidFill>
                 <a:latin typeface="Calibri" pitchFamily="34" charset="0"/>
                 <a:ea typeface="Calibri" pitchFamily="34" charset="-122"/>
@@ -5377,7 +5357,7 @@
             <a:r>
               <a:rPr lang="en-US" sz="1050" dirty="0">
                 <a:solidFill>
-                  <a:srgbClr val="93ABA0"/>
+                  <a:srgbClr val="55677A"/>
                 </a:solidFill>
                 <a:latin typeface="Calibri" pitchFamily="34" charset="0"/>
                 <a:ea typeface="Calibri" pitchFamily="34" charset="-122"/>
@@ -5406,11 +5386,11 @@
             </a:avLst>
           </a:prstGeom>
           <a:solidFill>
-            <a:srgbClr val="0D1520"/>
+            <a:srgbClr val="F5F7F9"/>
           </a:solidFill>
           <a:ln w="12700">
             <a:solidFill>
-              <a:srgbClr val="1E2D33"/>
+              <a:srgbClr val="DCE3EB"/>
             </a:solidFill>
             <a:prstDash val="solid"/>
           </a:ln>
@@ -5443,7 +5423,7 @@
             <a:r>
               <a:rPr lang="en-US" sz="1350" b="1" dirty="0">
                 <a:solidFill>
-                  <a:srgbClr val="2ADF8F"/>
+                  <a:srgbClr val="147A3D"/>
                 </a:solidFill>
                 <a:latin typeface="Calibri" pitchFamily="34" charset="0"/>
                 <a:ea typeface="Calibri" pitchFamily="34" charset="-122"/>
@@ -5482,7 +5462,7 @@
             <a:r>
               <a:rPr lang="en-US" sz="1050" dirty="0">
                 <a:solidFill>
-                  <a:srgbClr val="93ABA0"/>
+                  <a:srgbClr val="55677A"/>
                 </a:solidFill>
                 <a:latin typeface="Calibri" pitchFamily="34" charset="0"/>
                 <a:ea typeface="Calibri" pitchFamily="34" charset="-122"/>
@@ -5521,7 +5501,7 @@
             <a:r>
               <a:rPr lang="en-US" sz="900" dirty="0">
                 <a:solidFill>
-                  <a:srgbClr val="93ABA0"/>
+                  <a:srgbClr val="55677A"/>
                 </a:solidFill>
                 <a:latin typeface="Calibri" pitchFamily="34" charset="0"/>
                 <a:ea typeface="Calibri" pitchFamily="34" charset="-122"/>
@@ -5560,7 +5540,7 @@
             <a:r>
               <a:rPr lang="en-US" sz="900" dirty="0">
                 <a:solidFill>
-                  <a:srgbClr val="93ABA0"/>
+                  <a:srgbClr val="55677A"/>
                 </a:solidFill>
                 <a:latin typeface="Calibri" pitchFamily="34" charset="0"/>
                 <a:ea typeface="Calibri" pitchFamily="34" charset="-122"/>
@@ -5586,7 +5566,7 @@
     <p:bg>
       <p:bgPr>
         <a:solidFill>
-          <a:srgbClr val="05090D"/>
+          <a:srgbClr val="FFFFFF"/>
         </a:solidFill>
       </p:bgPr>
     </p:bg>
@@ -5631,7 +5611,7 @@
             <a:r>
               <a:rPr lang="en-US" sz="1100" b="1" spc="300" kern="0" dirty="0">
                 <a:solidFill>
-                  <a:srgbClr val="2ADF8F"/>
+                  <a:srgbClr val="147A3D"/>
                 </a:solidFill>
                 <a:latin typeface="Calibri" pitchFamily="34" charset="0"/>
                 <a:ea typeface="Calibri" pitchFamily="34" charset="-122"/>
@@ -5670,7 +5650,7 @@
             <a:r>
               <a:rPr lang="en-US" sz="3000" b="1" dirty="0">
                 <a:solidFill>
-                  <a:srgbClr val="E6F2EA"/>
+                  <a:srgbClr val="13202E"/>
                 </a:solidFill>
                 <a:latin typeface="Calibri" pitchFamily="34" charset="0"/>
                 <a:ea typeface="Calibri" pitchFamily="34" charset="-122"/>
@@ -5699,11 +5679,11 @@
             </a:avLst>
           </a:prstGeom>
           <a:solidFill>
-            <a:srgbClr val="0D1520"/>
+            <a:srgbClr val="F5F7F9"/>
           </a:solidFill>
           <a:ln w="12700">
             <a:solidFill>
-              <a:srgbClr val="1E2D33"/>
+              <a:srgbClr val="DCE3EB"/>
             </a:solidFill>
             <a:prstDash val="solid"/>
           </a:ln>
@@ -5795,7 +5775,7 @@
             <a:r>
               <a:rPr lang="en-US" sz="1200" b="1" dirty="0">
                 <a:solidFill>
-                  <a:srgbClr val="E6F2EA"/>
+                  <a:srgbClr val="13202E"/>
                 </a:solidFill>
                 <a:latin typeface="Calibri" pitchFamily="34" charset="0"/>
                 <a:ea typeface="Calibri" pitchFamily="34" charset="-122"/>
@@ -5834,13 +5814,13 @@
             <a:r>
               <a:rPr lang="en-US" sz="1000" dirty="0">
                 <a:solidFill>
-                  <a:srgbClr val="93ABA0"/>
-                </a:solidFill>
-                <a:latin typeface="Calibri" pitchFamily="34" charset="0"/>
-                <a:ea typeface="Calibri" pitchFamily="34" charset="-122"/>
-                <a:cs typeface="Calibri" pitchFamily="34" charset="-120"/>
-              </a:rPr>
-              <a:t>Settings → confirm 'Redirect all email' points at YOU. Theme set to Sentinel.</a:t>
+                  <a:srgbClr val="55677A"/>
+                </a:solidFill>
+                <a:latin typeface="Calibri" pitchFamily="34" charset="0"/>
+                <a:ea typeface="Calibri" pitchFamily="34" charset="-122"/>
+                <a:cs typeface="Calibri" pitchFamily="34" charset="-120"/>
+              </a:rPr>
+              <a:t>Settings → confirm 'Redirect all email' points at YOU. Pick the theme you present in.</a:t>
             </a:r>
             <a:endParaRPr lang="en-US" sz="1000" dirty="0"/>
           </a:p>
@@ -5932,7 +5912,7 @@
             <a:r>
               <a:rPr lang="en-US" sz="1200" b="1" dirty="0">
                 <a:solidFill>
-                  <a:srgbClr val="E6F2EA"/>
+                  <a:srgbClr val="13202E"/>
                 </a:solidFill>
                 <a:latin typeface="Calibri" pitchFamily="34" charset="0"/>
                 <a:ea typeface="Calibri" pitchFamily="34" charset="-122"/>
@@ -5971,7 +5951,7 @@
             <a:r>
               <a:rPr lang="en-US" sz="1000" dirty="0">
                 <a:solidFill>
-                  <a:srgbClr val="93ABA0"/>
+                  <a:srgbClr val="55677A"/>
                 </a:solidFill>
                 <a:latin typeface="Calibri" pitchFamily="34" charset="0"/>
                 <a:ea typeface="Calibri" pitchFamily="34" charset="-122"/>
@@ -6069,7 +6049,7 @@
             <a:r>
               <a:rPr lang="en-US" sz="1200" b="1" dirty="0">
                 <a:solidFill>
-                  <a:srgbClr val="E6F2EA"/>
+                  <a:srgbClr val="13202E"/>
                 </a:solidFill>
                 <a:latin typeface="Calibri" pitchFamily="34" charset="0"/>
                 <a:ea typeface="Calibri" pitchFamily="34" charset="-122"/>
@@ -6108,7 +6088,7 @@
             <a:r>
               <a:rPr lang="en-US" sz="1000" dirty="0">
                 <a:solidFill>
-                  <a:srgbClr val="93ABA0"/>
+                  <a:srgbClr val="55677A"/>
                 </a:solidFill>
                 <a:latin typeface="Calibri" pitchFamily="34" charset="0"/>
                 <a:ea typeface="Calibri" pitchFamily="34" charset="-122"/>
@@ -6206,7 +6186,7 @@
             <a:r>
               <a:rPr lang="en-US" sz="1200" b="1" dirty="0">
                 <a:solidFill>
-                  <a:srgbClr val="E6F2EA"/>
+                  <a:srgbClr val="13202E"/>
                 </a:solidFill>
                 <a:latin typeface="Calibri" pitchFamily="34" charset="0"/>
                 <a:ea typeface="Calibri" pitchFamily="34" charset="-122"/>
@@ -6245,7 +6225,7 @@
             <a:r>
               <a:rPr lang="en-US" sz="1000" dirty="0">
                 <a:solidFill>
-                  <a:srgbClr val="93ABA0"/>
+                  <a:srgbClr val="55677A"/>
                 </a:solidFill>
                 <a:latin typeface="Calibri" pitchFamily="34" charset="0"/>
                 <a:ea typeface="Calibri" pitchFamily="34" charset="-122"/>
@@ -6343,7 +6323,7 @@
             <a:r>
               <a:rPr lang="en-US" sz="1200" b="1" dirty="0">
                 <a:solidFill>
-                  <a:srgbClr val="E6F2EA"/>
+                  <a:srgbClr val="13202E"/>
                 </a:solidFill>
                 <a:latin typeface="Calibri" pitchFamily="34" charset="0"/>
                 <a:ea typeface="Calibri" pitchFamily="34" charset="-122"/>
@@ -6382,7 +6362,7 @@
             <a:r>
               <a:rPr lang="en-US" sz="1000" dirty="0">
                 <a:solidFill>
-                  <a:srgbClr val="93ABA0"/>
+                  <a:srgbClr val="55677A"/>
                 </a:solidFill>
                 <a:latin typeface="Calibri" pitchFamily="34" charset="0"/>
                 <a:ea typeface="Calibri" pitchFamily="34" charset="-122"/>
@@ -6480,7 +6460,7 @@
             <a:r>
               <a:rPr lang="en-US" sz="1200" b="1" dirty="0">
                 <a:solidFill>
-                  <a:srgbClr val="E6F2EA"/>
+                  <a:srgbClr val="13202E"/>
                 </a:solidFill>
                 <a:latin typeface="Calibri" pitchFamily="34" charset="0"/>
                 <a:ea typeface="Calibri" pitchFamily="34" charset="-122"/>
@@ -6519,7 +6499,7 @@
             <a:r>
               <a:rPr lang="en-US" sz="1000" dirty="0">
                 <a:solidFill>
-                  <a:srgbClr val="93ABA0"/>
+                  <a:srgbClr val="55677A"/>
                 </a:solidFill>
                 <a:latin typeface="Calibri" pitchFamily="34" charset="0"/>
                 <a:ea typeface="Calibri" pitchFamily="34" charset="-122"/>
@@ -6617,7 +6597,7 @@
             <a:r>
               <a:rPr lang="en-US" sz="1200" b="1" dirty="0">
                 <a:solidFill>
-                  <a:srgbClr val="E6F2EA"/>
+                  <a:srgbClr val="13202E"/>
                 </a:solidFill>
                 <a:latin typeface="Calibri" pitchFamily="34" charset="0"/>
                 <a:ea typeface="Calibri" pitchFamily="34" charset="-122"/>
@@ -6656,7 +6636,7 @@
             <a:r>
               <a:rPr lang="en-US" sz="1000" dirty="0">
                 <a:solidFill>
-                  <a:srgbClr val="93ABA0"/>
+                  <a:srgbClr val="55677A"/>
                 </a:solidFill>
                 <a:latin typeface="Calibri" pitchFamily="34" charset="0"/>
                 <a:ea typeface="Calibri" pitchFamily="34" charset="-122"/>
@@ -6754,7 +6734,7 @@
             <a:r>
               <a:rPr lang="en-US" sz="1200" b="1" dirty="0">
                 <a:solidFill>
-                  <a:srgbClr val="E6F2EA"/>
+                  <a:srgbClr val="13202E"/>
                 </a:solidFill>
                 <a:latin typeface="Calibri" pitchFamily="34" charset="0"/>
                 <a:ea typeface="Calibri" pitchFamily="34" charset="-122"/>
@@ -6793,13 +6773,13 @@
             <a:r>
               <a:rPr lang="en-US" sz="1000" dirty="0">
                 <a:solidFill>
-                  <a:srgbClr val="93ABA0"/>
-                </a:solidFill>
-                <a:latin typeface="Calibri" pitchFamily="34" charset="0"/>
-                <a:ea typeface="Calibri" pitchFamily="34" charset="-122"/>
-                <a:cs typeface="Calibri" pitchFamily="34" charset="-120"/>
-              </a:rPr>
-              <a:t>Second browser: sign in as the client. Submit-only workspace, notifications, report download.</a:t>
+                  <a:srgbClr val="55677A"/>
+                </a:solidFill>
+                <a:latin typeface="Calibri" pitchFamily="34" charset="0"/>
+                <a:ea typeface="Calibri" pitchFamily="34" charset="-122"/>
+                <a:cs typeface="Calibri" pitchFamily="34" charset="-120"/>
+              </a:rPr>
+              <a:t>Second browser: sign in as the client. Submit-only workspace, notifications page, report download.</a:t>
             </a:r>
             <a:endParaRPr lang="en-US" sz="1000" dirty="0"/>
           </a:p>
@@ -6832,7 +6812,7 @@
             <a:r>
               <a:rPr lang="en-US" sz="1200" i="1" dirty="0">
                 <a:solidFill>
-                  <a:srgbClr val="D4A72C"/>
+                  <a:srgbClr val="8F6400"/>
                 </a:solidFill>
                 <a:latin typeface="Calibri" pitchFamily="34" charset="0"/>
                 <a:ea typeface="Calibri" pitchFamily="34" charset="-122"/>
@@ -6871,7 +6851,7 @@
             <a:r>
               <a:rPr lang="en-US" sz="900" dirty="0">
                 <a:solidFill>
-                  <a:srgbClr val="93ABA0"/>
+                  <a:srgbClr val="55677A"/>
                 </a:solidFill>
                 <a:latin typeface="Calibri" pitchFamily="34" charset="0"/>
                 <a:ea typeface="Calibri" pitchFamily="34" charset="-122"/>
@@ -6910,7 +6890,7 @@
             <a:r>
               <a:rPr lang="en-US" sz="900" dirty="0">
                 <a:solidFill>
-                  <a:srgbClr val="93ABA0"/>
+                  <a:srgbClr val="55677A"/>
                 </a:solidFill>
                 <a:latin typeface="Calibri" pitchFamily="34" charset="0"/>
                 <a:ea typeface="Calibri" pitchFamily="34" charset="-122"/>
@@ -6936,7 +6916,7 @@
     <p:bg>
       <p:bgPr>
         <a:solidFill>
-          <a:srgbClr val="05090D"/>
+          <a:srgbClr val="FFFFFF"/>
         </a:solidFill>
       </p:bgPr>
     </p:bg>
@@ -6981,7 +6961,7 @@
             <a:r>
               <a:rPr lang="en-US" sz="4400" b="1" dirty="0">
                 <a:solidFill>
-                  <a:srgbClr val="E6F2EA"/>
+                  <a:srgbClr val="13202E"/>
                 </a:solidFill>
                 <a:latin typeface="Calibri" pitchFamily="34" charset="0"/>
                 <a:ea typeface="Calibri" pitchFamily="34" charset="-122"/>
@@ -7020,7 +7000,7 @@
             <a:r>
               <a:rPr lang="en-US" sz="2000" b="1" dirty="0">
                 <a:solidFill>
-                  <a:srgbClr val="2ADF8F"/>
+                  <a:srgbClr val="147A3D"/>
                 </a:solidFill>
                 <a:latin typeface="Calibri" pitchFamily="34" charset="0"/>
                 <a:ea typeface="Calibri" pitchFamily="34" charset="-122"/>
@@ -7034,7 +7014,7 @@
             <a:r>
               <a:rPr lang="en-US" sz="2000" dirty="0">
                 <a:solidFill>
-                  <a:srgbClr val="93ABA0"/>
+                  <a:srgbClr val="55677A"/>
                 </a:solidFill>
                 <a:latin typeface="Calibri" pitchFamily="34" charset="0"/>
                 <a:ea typeface="Calibri" pitchFamily="34" charset="-122"/>
@@ -7073,7 +7053,7 @@
             <a:r>
               <a:rPr lang="en-US" sz="1300" dirty="0">
                 <a:solidFill>
-                  <a:srgbClr val="93ABA0"/>
+                  <a:srgbClr val="55677A"/>
                 </a:solidFill>
                 <a:latin typeface="Calibri" pitchFamily="34" charset="0"/>
                 <a:ea typeface="Calibri" pitchFamily="34" charset="-122"/>
@@ -7099,7 +7079,7 @@
     <p:bg>
       <p:bgPr>
         <a:solidFill>
-          <a:srgbClr val="05090D"/>
+          <a:srgbClr val="FFFFFF"/>
         </a:solidFill>
       </p:bgPr>
     </p:bg>
@@ -7144,7 +7124,7 @@
             <a:r>
               <a:rPr lang="en-US" sz="1100" b="1" spc="300" kern="0" dirty="0">
                 <a:solidFill>
-                  <a:srgbClr val="2ADF8F"/>
+                  <a:srgbClr val="147A3D"/>
                 </a:solidFill>
                 <a:latin typeface="Calibri" pitchFamily="34" charset="0"/>
                 <a:ea typeface="Calibri" pitchFamily="34" charset="-122"/>
@@ -7183,7 +7163,7 @@
             <a:r>
               <a:rPr lang="en-US" sz="3000" b="1" dirty="0">
                 <a:solidFill>
-                  <a:srgbClr val="E6F2EA"/>
+                  <a:srgbClr val="13202E"/>
                 </a:solidFill>
                 <a:latin typeface="Calibri" pitchFamily="34" charset="0"/>
                 <a:ea typeface="Calibri" pitchFamily="34" charset="-122"/>
@@ -7226,7 +7206,7 @@
             <a:r>
               <a:rPr lang="en-US" sz="1400" dirty="0">
                 <a:solidFill>
-                  <a:srgbClr val="E6F2EA"/>
+                  <a:srgbClr val="13202E"/>
                 </a:solidFill>
                 <a:latin typeface="Calibri" pitchFamily="34" charset="0"/>
                 <a:ea typeface="Calibri" pitchFamily="34" charset="-122"/>
@@ -7247,7 +7227,7 @@
             <a:r>
               <a:rPr lang="en-US" sz="1400" dirty="0">
                 <a:solidFill>
-                  <a:srgbClr val="E6F2EA"/>
+                  <a:srgbClr val="13202E"/>
                 </a:solidFill>
                 <a:latin typeface="Calibri" pitchFamily="34" charset="0"/>
                 <a:ea typeface="Calibri" pitchFamily="34" charset="-122"/>
@@ -7268,7 +7248,7 @@
             <a:r>
               <a:rPr lang="en-US" sz="1400" dirty="0">
                 <a:solidFill>
-                  <a:srgbClr val="E6F2EA"/>
+                  <a:srgbClr val="13202E"/>
                 </a:solidFill>
                 <a:latin typeface="Calibri" pitchFamily="34" charset="0"/>
                 <a:ea typeface="Calibri" pitchFamily="34" charset="-122"/>
@@ -7289,7 +7269,7 @@
             <a:r>
               <a:rPr lang="en-US" sz="1400" dirty="0">
                 <a:solidFill>
-                  <a:srgbClr val="E6F2EA"/>
+                  <a:srgbClr val="13202E"/>
                 </a:solidFill>
                 <a:latin typeface="Calibri" pitchFamily="34" charset="0"/>
                 <a:ea typeface="Calibri" pitchFamily="34" charset="-122"/>
@@ -7310,7 +7290,7 @@
             <a:r>
               <a:rPr lang="en-US" sz="1400" dirty="0">
                 <a:solidFill>
-                  <a:srgbClr val="E6F2EA"/>
+                  <a:srgbClr val="13202E"/>
                 </a:solidFill>
                 <a:latin typeface="Calibri" pitchFamily="34" charset="0"/>
                 <a:ea typeface="Calibri" pitchFamily="34" charset="-122"/>
@@ -7339,11 +7319,11 @@
             </a:avLst>
           </a:prstGeom>
           <a:solidFill>
-            <a:srgbClr val="0D1520"/>
+            <a:srgbClr val="F5F7F9"/>
           </a:solidFill>
           <a:ln w="12700">
             <a:solidFill>
-              <a:srgbClr val="1E2D33"/>
+              <a:srgbClr val="DCE3EB"/>
             </a:solidFill>
             <a:prstDash val="solid"/>
           </a:ln>
@@ -7376,7 +7356,7 @@
             <a:r>
               <a:rPr lang="en-US" sz="1050" b="1" spc="200" kern="0" dirty="0">
                 <a:solidFill>
-                  <a:srgbClr val="93ABA0"/>
+                  <a:srgbClr val="55677A"/>
                 </a:solidFill>
                 <a:latin typeface="Calibri" pitchFamily="34" charset="0"/>
                 <a:ea typeface="Calibri" pitchFamily="34" charset="-122"/>
@@ -7405,7 +7385,7 @@
             </a:avLst>
           </a:prstGeom>
           <a:solidFill>
-            <a:srgbClr val="0D2B1B"/>
+            <a:srgbClr val="D8F5E1"/>
           </a:solidFill>
           <a:ln/>
         </p:spPr>
@@ -7437,7 +7417,7 @@
             <a:r>
               <a:rPr lang="en-US" sz="1050" b="1" dirty="0">
                 <a:solidFill>
-                  <a:srgbClr val="5FE3A4"/>
+                  <a:srgbClr val="0E6329"/>
                 </a:solidFill>
                 <a:latin typeface="Calibri" pitchFamily="34" charset="0"/>
                 <a:ea typeface="Calibri" pitchFamily="34" charset="-122"/>
@@ -7476,7 +7456,7 @@
             <a:r>
               <a:rPr lang="en-US" sz="1050" dirty="0">
                 <a:solidFill>
-                  <a:srgbClr val="93ABA0"/>
+                  <a:srgbClr val="55677A"/>
                 </a:solidFill>
                 <a:latin typeface="Calibri" pitchFamily="34" charset="0"/>
                 <a:ea typeface="Calibri" pitchFamily="34" charset="-122"/>
@@ -7505,7 +7485,7 @@
             </a:avLst>
           </a:prstGeom>
           <a:solidFill>
-            <a:srgbClr val="3D3117"/>
+            <a:srgbClr val="FBEEC2"/>
           </a:solidFill>
           <a:ln/>
         </p:spPr>
@@ -7537,7 +7517,7 @@
             <a:r>
               <a:rPr lang="en-US" sz="1050" b="1" dirty="0">
                 <a:solidFill>
-                  <a:srgbClr val="EFD07E"/>
+                  <a:srgbClr val="6B4E00"/>
                 </a:solidFill>
                 <a:latin typeface="Calibri" pitchFamily="34" charset="0"/>
                 <a:ea typeface="Calibri" pitchFamily="34" charset="-122"/>
@@ -7576,7 +7556,7 @@
             <a:r>
               <a:rPr lang="en-US" sz="1050" dirty="0">
                 <a:solidFill>
-                  <a:srgbClr val="93ABA0"/>
+                  <a:srgbClr val="55677A"/>
                 </a:solidFill>
                 <a:latin typeface="Calibri" pitchFamily="34" charset="0"/>
                 <a:ea typeface="Calibri" pitchFamily="34" charset="-122"/>
@@ -7605,7 +7585,7 @@
             </a:avLst>
           </a:prstGeom>
           <a:solidFill>
-            <a:srgbClr val="46201F"/>
+            <a:srgbClr val="FBE2E0"/>
           </a:solidFill>
           <a:ln/>
         </p:spPr>
@@ -7637,7 +7617,7 @@
             <a:r>
               <a:rPr lang="en-US" sz="1050" b="1" dirty="0">
                 <a:solidFill>
-                  <a:srgbClr val="FFA8A0"/>
+                  <a:srgbClr val="A11A28"/>
                 </a:solidFill>
                 <a:latin typeface="Calibri" pitchFamily="34" charset="0"/>
                 <a:ea typeface="Calibri" pitchFamily="34" charset="-122"/>
@@ -7676,7 +7656,7 @@
             <a:r>
               <a:rPr lang="en-US" sz="1050" dirty="0">
                 <a:solidFill>
-                  <a:srgbClr val="93ABA0"/>
+                  <a:srgbClr val="55677A"/>
                 </a:solidFill>
                 <a:latin typeface="Calibri" pitchFamily="34" charset="0"/>
                 <a:ea typeface="Calibri" pitchFamily="34" charset="-122"/>
@@ -7705,7 +7685,7 @@
             </a:avLst>
           </a:prstGeom>
           <a:solidFill>
-            <a:srgbClr val="26313C"/>
+            <a:srgbClr val="E2EAF1"/>
           </a:solidFill>
           <a:ln/>
         </p:spPr>
@@ -7737,7 +7717,7 @@
             <a:r>
               <a:rPr lang="en-US" sz="1050" b="1" dirty="0">
                 <a:solidFill>
-                  <a:srgbClr val="B9CBDB"/>
+                  <a:srgbClr val="3E5568"/>
                 </a:solidFill>
                 <a:latin typeface="Calibri" pitchFamily="34" charset="0"/>
                 <a:ea typeface="Calibri" pitchFamily="34" charset="-122"/>
@@ -7776,7 +7756,7 @@
             <a:r>
               <a:rPr lang="en-US" sz="1050" dirty="0">
                 <a:solidFill>
-                  <a:srgbClr val="93ABA0"/>
+                  <a:srgbClr val="55677A"/>
                 </a:solidFill>
                 <a:latin typeface="Calibri" pitchFamily="34" charset="0"/>
                 <a:ea typeface="Calibri" pitchFamily="34" charset="-122"/>
@@ -7805,7 +7785,7 @@
             </a:avLst>
           </a:prstGeom>
           <a:solidFill>
-            <a:srgbClr val="252B4E"/>
+            <a:srgbClr val="E4E7FB"/>
           </a:solidFill>
           <a:ln/>
         </p:spPr>
@@ -7837,7 +7817,7 @@
             <a:r>
               <a:rPr lang="en-US" sz="1050" b="1" dirty="0">
                 <a:solidFill>
-                  <a:srgbClr val="BCC5F5"/>
+                  <a:srgbClr val="3A47A8"/>
                 </a:solidFill>
                 <a:latin typeface="Calibri" pitchFamily="34" charset="0"/>
                 <a:ea typeface="Calibri" pitchFamily="34" charset="-122"/>
@@ -7876,7 +7856,7 @@
             <a:r>
               <a:rPr lang="en-US" sz="1050" dirty="0">
                 <a:solidFill>
-                  <a:srgbClr val="93ABA0"/>
+                  <a:srgbClr val="55677A"/>
                 </a:solidFill>
                 <a:latin typeface="Calibri" pitchFamily="34" charset="0"/>
                 <a:ea typeface="Calibri" pitchFamily="34" charset="-122"/>
@@ -7915,7 +7895,7 @@
             <a:r>
               <a:rPr lang="en-US" sz="900" dirty="0">
                 <a:solidFill>
-                  <a:srgbClr val="93ABA0"/>
+                  <a:srgbClr val="55677A"/>
                 </a:solidFill>
                 <a:latin typeface="Calibri" pitchFamily="34" charset="0"/>
                 <a:ea typeface="Calibri" pitchFamily="34" charset="-122"/>
@@ -7954,7 +7934,7 @@
             <a:r>
               <a:rPr lang="en-US" sz="900" dirty="0">
                 <a:solidFill>
-                  <a:srgbClr val="93ABA0"/>
+                  <a:srgbClr val="55677A"/>
                 </a:solidFill>
                 <a:latin typeface="Calibri" pitchFamily="34" charset="0"/>
                 <a:ea typeface="Calibri" pitchFamily="34" charset="-122"/>
@@ -7980,7 +7960,7 @@
     <p:bg>
       <p:bgPr>
         <a:solidFill>
-          <a:srgbClr val="05090D"/>
+          <a:srgbClr val="FFFFFF"/>
         </a:solidFill>
       </p:bgPr>
     </p:bg>
@@ -8025,7 +8005,7 @@
             <a:r>
               <a:rPr lang="en-US" sz="1100" b="1" spc="300" kern="0" dirty="0">
                 <a:solidFill>
-                  <a:srgbClr val="2ADF8F"/>
+                  <a:srgbClr val="147A3D"/>
                 </a:solidFill>
                 <a:latin typeface="Calibri" pitchFamily="34" charset="0"/>
                 <a:ea typeface="Calibri" pitchFamily="34" charset="-122"/>
@@ -8064,7 +8044,7 @@
             <a:r>
               <a:rPr lang="en-US" sz="3000" b="1" dirty="0">
                 <a:solidFill>
-                  <a:srgbClr val="E6F2EA"/>
+                  <a:srgbClr val="13202E"/>
                 </a:solidFill>
                 <a:latin typeface="Calibri" pitchFamily="34" charset="0"/>
                 <a:ea typeface="Calibri" pitchFamily="34" charset="-122"/>
@@ -8093,11 +8073,11 @@
             </a:avLst>
           </a:prstGeom>
           <a:solidFill>
-            <a:srgbClr val="0D1520"/>
+            <a:srgbClr val="F5F7F9"/>
           </a:solidFill>
           <a:ln w="12700">
             <a:solidFill>
-              <a:srgbClr val="1E2D33"/>
+              <a:srgbClr val="DCE3EB"/>
             </a:solidFill>
             <a:prstDash val="solid"/>
           </a:ln>
@@ -8166,7 +8146,7 @@
             <a:r>
               <a:rPr lang="en-US" sz="1350" b="1" dirty="0">
                 <a:solidFill>
-                  <a:srgbClr val="2ADF8F"/>
+                  <a:srgbClr val="147A3D"/>
                 </a:solidFill>
                 <a:latin typeface="Calibri" pitchFamily="34" charset="0"/>
                 <a:ea typeface="Calibri" pitchFamily="34" charset="-122"/>
@@ -8237,7 +8217,7 @@
             <a:r>
               <a:rPr lang="en-US" sz="1250" dirty="0">
                 <a:solidFill>
-                  <a:srgbClr val="93ABA0"/>
+                  <a:srgbClr val="55677A"/>
                 </a:solidFill>
                 <a:latin typeface="Calibri" pitchFamily="34" charset="0"/>
                 <a:ea typeface="Calibri" pitchFamily="34" charset="-122"/>
@@ -8258,7 +8238,7 @@
             <a:r>
               <a:rPr lang="en-US" sz="1250" dirty="0">
                 <a:solidFill>
-                  <a:srgbClr val="93ABA0"/>
+                  <a:srgbClr val="55677A"/>
                 </a:solidFill>
                 <a:latin typeface="Calibri" pitchFamily="34" charset="0"/>
                 <a:ea typeface="Calibri" pitchFamily="34" charset="-122"/>
@@ -8279,7 +8259,7 @@
             <a:r>
               <a:rPr lang="en-US" sz="1250" dirty="0">
                 <a:solidFill>
-                  <a:srgbClr val="93ABA0"/>
+                  <a:srgbClr val="55677A"/>
                 </a:solidFill>
                 <a:latin typeface="Calibri" pitchFamily="34" charset="0"/>
                 <a:ea typeface="Calibri" pitchFamily="34" charset="-122"/>
@@ -8308,11 +8288,11 @@
             </a:avLst>
           </a:prstGeom>
           <a:solidFill>
-            <a:srgbClr val="0D1520"/>
+            <a:srgbClr val="F5F7F9"/>
           </a:solidFill>
           <a:ln w="12700">
             <a:solidFill>
-              <a:srgbClr val="1E2D33"/>
+              <a:srgbClr val="DCE3EB"/>
             </a:solidFill>
             <a:prstDash val="solid"/>
           </a:ln>
@@ -8381,7 +8361,7 @@
             <a:r>
               <a:rPr lang="en-US" sz="1350" b="1" dirty="0">
                 <a:solidFill>
-                  <a:srgbClr val="58A6FF"/>
+                  <a:srgbClr val="1D63D8"/>
                 </a:solidFill>
                 <a:latin typeface="Calibri" pitchFamily="34" charset="0"/>
                 <a:ea typeface="Calibri" pitchFamily="34" charset="-122"/>
@@ -8452,7 +8432,7 @@
             <a:r>
               <a:rPr lang="en-US" sz="1250" dirty="0">
                 <a:solidFill>
-                  <a:srgbClr val="93ABA0"/>
+                  <a:srgbClr val="55677A"/>
                 </a:solidFill>
                 <a:latin typeface="Calibri" pitchFamily="34" charset="0"/>
                 <a:ea typeface="Calibri" pitchFamily="34" charset="-122"/>
@@ -8473,7 +8453,7 @@
             <a:r>
               <a:rPr lang="en-US" sz="1250" dirty="0">
                 <a:solidFill>
-                  <a:srgbClr val="93ABA0"/>
+                  <a:srgbClr val="55677A"/>
                 </a:solidFill>
                 <a:latin typeface="Calibri" pitchFamily="34" charset="0"/>
                 <a:ea typeface="Calibri" pitchFamily="34" charset="-122"/>
@@ -8494,7 +8474,7 @@
             <a:r>
               <a:rPr lang="en-US" sz="1250" dirty="0">
                 <a:solidFill>
-                  <a:srgbClr val="93ABA0"/>
+                  <a:srgbClr val="55677A"/>
                 </a:solidFill>
                 <a:latin typeface="Calibri" pitchFamily="34" charset="0"/>
                 <a:ea typeface="Calibri" pitchFamily="34" charset="-122"/>
@@ -8515,7 +8495,7 @@
             <a:r>
               <a:rPr lang="en-US" sz="1250" dirty="0">
                 <a:solidFill>
-                  <a:srgbClr val="93ABA0"/>
+                  <a:srgbClr val="55677A"/>
                 </a:solidFill>
                 <a:latin typeface="Calibri" pitchFamily="34" charset="0"/>
                 <a:ea typeface="Calibri" pitchFamily="34" charset="-122"/>
@@ -8554,7 +8534,7 @@
             <a:r>
               <a:rPr lang="en-US" sz="900" dirty="0">
                 <a:solidFill>
-                  <a:srgbClr val="93ABA0"/>
+                  <a:srgbClr val="55677A"/>
                 </a:solidFill>
                 <a:latin typeface="Calibri" pitchFamily="34" charset="0"/>
                 <a:ea typeface="Calibri" pitchFamily="34" charset="-122"/>
@@ -8593,7 +8573,7 @@
             <a:r>
               <a:rPr lang="en-US" sz="900" dirty="0">
                 <a:solidFill>
-                  <a:srgbClr val="93ABA0"/>
+                  <a:srgbClr val="55677A"/>
                 </a:solidFill>
                 <a:latin typeface="Calibri" pitchFamily="34" charset="0"/>
                 <a:ea typeface="Calibri" pitchFamily="34" charset="-122"/>
@@ -8619,7 +8599,7 @@
     <p:bg>
       <p:bgPr>
         <a:solidFill>
-          <a:srgbClr val="05090D"/>
+          <a:srgbClr val="FFFFFF"/>
         </a:solidFill>
       </p:bgPr>
     </p:bg>
@@ -8664,7 +8644,7 @@
             <a:r>
               <a:rPr lang="en-US" sz="1100" b="1" spc="300" kern="0" dirty="0">
                 <a:solidFill>
-                  <a:srgbClr val="2ADF8F"/>
+                  <a:srgbClr val="147A3D"/>
                 </a:solidFill>
                 <a:latin typeface="Calibri" pitchFamily="34" charset="0"/>
                 <a:ea typeface="Calibri" pitchFamily="34" charset="-122"/>
@@ -8703,7 +8683,7 @@
             <a:r>
               <a:rPr lang="en-US" sz="3000" b="1" dirty="0">
                 <a:solidFill>
-                  <a:srgbClr val="E6F2EA"/>
+                  <a:srgbClr val="13202E"/>
                 </a:solidFill>
                 <a:latin typeface="Calibri" pitchFamily="34" charset="0"/>
                 <a:ea typeface="Calibri" pitchFamily="34" charset="-122"/>
@@ -8746,7 +8726,7 @@
             <a:r>
               <a:rPr lang="en-US" sz="1400" dirty="0">
                 <a:solidFill>
-                  <a:srgbClr val="E6F2EA"/>
+                  <a:srgbClr val="13202E"/>
                 </a:solidFill>
                 <a:latin typeface="Calibri" pitchFamily="34" charset="0"/>
                 <a:ea typeface="Calibri" pitchFamily="34" charset="-122"/>
@@ -8767,7 +8747,7 @@
             <a:r>
               <a:rPr lang="en-US" sz="1400" dirty="0">
                 <a:solidFill>
-                  <a:srgbClr val="E6F2EA"/>
+                  <a:srgbClr val="13202E"/>
                 </a:solidFill>
                 <a:latin typeface="Calibri" pitchFamily="34" charset="0"/>
                 <a:ea typeface="Calibri" pitchFamily="34" charset="-122"/>
@@ -8788,7 +8768,7 @@
             <a:r>
               <a:rPr lang="en-US" sz="1400" dirty="0">
                 <a:solidFill>
-                  <a:srgbClr val="E6F2EA"/>
+                  <a:srgbClr val="13202E"/>
                 </a:solidFill>
                 <a:latin typeface="Calibri" pitchFamily="34" charset="0"/>
                 <a:ea typeface="Calibri" pitchFamily="34" charset="-122"/>
@@ -8809,7 +8789,7 @@
             <a:r>
               <a:rPr lang="en-US" sz="1400" dirty="0">
                 <a:solidFill>
-                  <a:srgbClr val="E6F2EA"/>
+                  <a:srgbClr val="13202E"/>
                 </a:solidFill>
                 <a:latin typeface="Calibri" pitchFamily="34" charset="0"/>
                 <a:ea typeface="Calibri" pitchFamily="34" charset="-122"/>
@@ -8838,11 +8818,11 @@
             </a:avLst>
           </a:prstGeom>
           <a:solidFill>
-            <a:srgbClr val="0D1520"/>
+            <a:srgbClr val="F5F7F9"/>
           </a:solidFill>
           <a:ln w="12700">
             <a:solidFill>
-              <a:srgbClr val="1E2D33"/>
+              <a:srgbClr val="DCE3EB"/>
             </a:solidFill>
             <a:prstDash val="solid"/>
           </a:ln>
@@ -8875,7 +8855,7 @@
             <a:r>
               <a:rPr lang="en-US" sz="1050" b="1" spc="200" kern="0" dirty="0">
                 <a:solidFill>
-                  <a:srgbClr val="93ABA0"/>
+                  <a:srgbClr val="55677A"/>
                 </a:solidFill>
                 <a:latin typeface="Calibri" pitchFamily="34" charset="0"/>
                 <a:ea typeface="Calibri" pitchFamily="34" charset="-122"/>
@@ -8914,7 +8894,7 @@
             <a:r>
               <a:rPr lang="en-US" sz="1250" b="1" dirty="0">
                 <a:solidFill>
-                  <a:srgbClr val="2ADF8F"/>
+                  <a:srgbClr val="147A3D"/>
                 </a:solidFill>
                 <a:latin typeface="Calibri" pitchFamily="34" charset="0"/>
                 <a:ea typeface="Calibri" pitchFamily="34" charset="-122"/>
@@ -8953,7 +8933,7 @@
             <a:r>
               <a:rPr lang="en-US" sz="1100" dirty="0">
                 <a:solidFill>
-                  <a:srgbClr val="93ABA0"/>
+                  <a:srgbClr val="55677A"/>
                 </a:solidFill>
                 <a:latin typeface="Calibri" pitchFamily="34" charset="0"/>
                 <a:ea typeface="Calibri" pitchFamily="34" charset="-122"/>
@@ -8992,7 +8972,7 @@
             <a:r>
               <a:rPr lang="en-US" sz="1250" b="1" dirty="0">
                 <a:solidFill>
-                  <a:srgbClr val="A58BFF"/>
+                  <a:srgbClr val="6A4DE0"/>
                 </a:solidFill>
                 <a:latin typeface="Calibri" pitchFamily="34" charset="0"/>
                 <a:ea typeface="Calibri" pitchFamily="34" charset="-122"/>
@@ -9031,7 +9011,7 @@
             <a:r>
               <a:rPr lang="en-US" sz="1100" dirty="0">
                 <a:solidFill>
-                  <a:srgbClr val="93ABA0"/>
+                  <a:srgbClr val="55677A"/>
                 </a:solidFill>
                 <a:latin typeface="Calibri" pitchFamily="34" charset="0"/>
                 <a:ea typeface="Calibri" pitchFamily="34" charset="-122"/>
@@ -9070,7 +9050,7 @@
             <a:r>
               <a:rPr lang="en-US" sz="1250" b="1" dirty="0">
                 <a:solidFill>
-                  <a:srgbClr val="D05616"/>
+                  <a:srgbClr val="B4380B"/>
                 </a:solidFill>
                 <a:latin typeface="Calibri" pitchFamily="34" charset="0"/>
                 <a:ea typeface="Calibri" pitchFamily="34" charset="-122"/>
@@ -9109,7 +9089,7 @@
             <a:r>
               <a:rPr lang="en-US" sz="1100" dirty="0">
                 <a:solidFill>
-                  <a:srgbClr val="93ABA0"/>
+                  <a:srgbClr val="55677A"/>
                 </a:solidFill>
                 <a:latin typeface="Calibri" pitchFamily="34" charset="0"/>
                 <a:ea typeface="Calibri" pitchFamily="34" charset="-122"/>
@@ -9148,7 +9128,7 @@
             <a:r>
               <a:rPr lang="en-US" sz="1250" b="1" dirty="0">
                 <a:solidFill>
-                  <a:srgbClr val="58A6FF"/>
+                  <a:srgbClr val="1D63D8"/>
                 </a:solidFill>
                 <a:latin typeface="Calibri" pitchFamily="34" charset="0"/>
                 <a:ea typeface="Calibri" pitchFamily="34" charset="-122"/>
@@ -9187,7 +9167,7 @@
             <a:r>
               <a:rPr lang="en-US" sz="1100" dirty="0">
                 <a:solidFill>
-                  <a:srgbClr val="93ABA0"/>
+                  <a:srgbClr val="55677A"/>
                 </a:solidFill>
                 <a:latin typeface="Calibri" pitchFamily="34" charset="0"/>
                 <a:ea typeface="Calibri" pitchFamily="34" charset="-122"/>
@@ -9226,7 +9206,7 @@
             <a:r>
               <a:rPr lang="en-US" sz="1250" b="1" dirty="0">
                 <a:solidFill>
-                  <a:srgbClr val="9FB6CD"/>
+                  <a:srgbClr val="55677A"/>
                 </a:solidFill>
                 <a:latin typeface="Calibri" pitchFamily="34" charset="0"/>
                 <a:ea typeface="Calibri" pitchFamily="34" charset="-122"/>
@@ -9265,7 +9245,7 @@
             <a:r>
               <a:rPr lang="en-US" sz="1100" dirty="0">
                 <a:solidFill>
-                  <a:srgbClr val="93ABA0"/>
+                  <a:srgbClr val="55677A"/>
                 </a:solidFill>
                 <a:latin typeface="Calibri" pitchFamily="34" charset="0"/>
                 <a:ea typeface="Calibri" pitchFamily="34" charset="-122"/>
@@ -9304,7 +9284,7 @@
             <a:r>
               <a:rPr lang="en-US" sz="1250" b="1" dirty="0">
                 <a:solidFill>
-                  <a:srgbClr val="4FC1F5"/>
+                  <a:srgbClr val="0E7FB8"/>
                 </a:solidFill>
                 <a:latin typeface="Calibri" pitchFamily="34" charset="0"/>
                 <a:ea typeface="Calibri" pitchFamily="34" charset="-122"/>
@@ -9343,7 +9323,7 @@
             <a:r>
               <a:rPr lang="en-US" sz="1100" dirty="0">
                 <a:solidFill>
-                  <a:srgbClr val="93ABA0"/>
+                  <a:srgbClr val="55677A"/>
                 </a:solidFill>
                 <a:latin typeface="Calibri" pitchFamily="34" charset="0"/>
                 <a:ea typeface="Calibri" pitchFamily="34" charset="-122"/>
@@ -9382,7 +9362,7 @@
             <a:r>
               <a:rPr lang="en-US" sz="900" dirty="0">
                 <a:solidFill>
-                  <a:srgbClr val="93ABA0"/>
+                  <a:srgbClr val="55677A"/>
                 </a:solidFill>
                 <a:latin typeface="Calibri" pitchFamily="34" charset="0"/>
                 <a:ea typeface="Calibri" pitchFamily="34" charset="-122"/>
@@ -9421,7 +9401,7 @@
             <a:r>
               <a:rPr lang="en-US" sz="900" dirty="0">
                 <a:solidFill>
-                  <a:srgbClr val="93ABA0"/>
+                  <a:srgbClr val="55677A"/>
                 </a:solidFill>
                 <a:latin typeface="Calibri" pitchFamily="34" charset="0"/>
                 <a:ea typeface="Calibri" pitchFamily="34" charset="-122"/>
@@ -9447,7 +9427,7 @@
     <p:bg>
       <p:bgPr>
         <a:solidFill>
-          <a:srgbClr val="05090D"/>
+          <a:srgbClr val="FFFFFF"/>
         </a:solidFill>
       </p:bgPr>
     </p:bg>
@@ -9492,7 +9472,7 @@
             <a:r>
               <a:rPr lang="en-US" sz="1100" b="1" spc="300" kern="0" dirty="0">
                 <a:solidFill>
-                  <a:srgbClr val="2ADF8F"/>
+                  <a:srgbClr val="147A3D"/>
                 </a:solidFill>
                 <a:latin typeface="Calibri" pitchFamily="34" charset="0"/>
                 <a:ea typeface="Calibri" pitchFamily="34" charset="-122"/>
@@ -9531,7 +9511,7 @@
             <a:r>
               <a:rPr lang="en-US" sz="3000" b="1" dirty="0">
                 <a:solidFill>
-                  <a:srgbClr val="E6F2EA"/>
+                  <a:srgbClr val="13202E"/>
                 </a:solidFill>
                 <a:latin typeface="Calibri" pitchFamily="34" charset="0"/>
                 <a:ea typeface="Calibri" pitchFamily="34" charset="-122"/>
@@ -9560,11 +9540,11 @@
             </a:avLst>
           </a:prstGeom>
           <a:solidFill>
-            <a:srgbClr val="0D1520"/>
+            <a:srgbClr val="F5F7F9"/>
           </a:solidFill>
           <a:ln w="12700">
             <a:solidFill>
-              <a:srgbClr val="1E2D33"/>
+              <a:srgbClr val="DCE3EB"/>
             </a:solidFill>
             <a:prstDash val="solid"/>
           </a:ln>
@@ -9656,7 +9636,7 @@
             <a:r>
               <a:rPr lang="en-US" sz="1350" b="1" dirty="0">
                 <a:solidFill>
-                  <a:srgbClr val="E6F2EA"/>
+                  <a:srgbClr val="13202E"/>
                 </a:solidFill>
                 <a:latin typeface="Calibri" pitchFamily="34" charset="0"/>
                 <a:ea typeface="Calibri" pitchFamily="34" charset="-122"/>
@@ -9695,7 +9675,7 @@
             <a:r>
               <a:rPr lang="en-US" sz="1100" dirty="0">
                 <a:solidFill>
-                  <a:srgbClr val="93ABA0"/>
+                  <a:srgbClr val="55677A"/>
                 </a:solidFill>
                 <a:latin typeface="Calibri" pitchFamily="34" charset="0"/>
                 <a:ea typeface="Calibri" pitchFamily="34" charset="-122"/>
@@ -9724,11 +9704,11 @@
             </a:avLst>
           </a:prstGeom>
           <a:solidFill>
-            <a:srgbClr val="0D1520"/>
+            <a:srgbClr val="F5F7F9"/>
           </a:solidFill>
           <a:ln w="12700">
             <a:solidFill>
-              <a:srgbClr val="1E2D33"/>
+              <a:srgbClr val="DCE3EB"/>
             </a:solidFill>
             <a:prstDash val="solid"/>
           </a:ln>
@@ -9820,7 +9800,7 @@
             <a:r>
               <a:rPr lang="en-US" sz="1350" b="1" dirty="0">
                 <a:solidFill>
-                  <a:srgbClr val="E6F2EA"/>
+                  <a:srgbClr val="13202E"/>
                 </a:solidFill>
                 <a:latin typeface="Calibri" pitchFamily="34" charset="0"/>
                 <a:ea typeface="Calibri" pitchFamily="34" charset="-122"/>
@@ -9859,7 +9839,7 @@
             <a:r>
               <a:rPr lang="en-US" sz="1100" dirty="0">
                 <a:solidFill>
-                  <a:srgbClr val="93ABA0"/>
+                  <a:srgbClr val="55677A"/>
                 </a:solidFill>
                 <a:latin typeface="Calibri" pitchFamily="34" charset="0"/>
                 <a:ea typeface="Calibri" pitchFamily="34" charset="-122"/>
@@ -9888,11 +9868,11 @@
             </a:avLst>
           </a:prstGeom>
           <a:solidFill>
-            <a:srgbClr val="0D1520"/>
+            <a:srgbClr val="F5F7F9"/>
           </a:solidFill>
           <a:ln w="12700">
             <a:solidFill>
-              <a:srgbClr val="1E2D33"/>
+              <a:srgbClr val="DCE3EB"/>
             </a:solidFill>
             <a:prstDash val="solid"/>
           </a:ln>
@@ -9984,7 +9964,7 @@
             <a:r>
               <a:rPr lang="en-US" sz="1350" b="1" dirty="0">
                 <a:solidFill>
-                  <a:srgbClr val="E6F2EA"/>
+                  <a:srgbClr val="13202E"/>
                 </a:solidFill>
                 <a:latin typeface="Calibri" pitchFamily="34" charset="0"/>
                 <a:ea typeface="Calibri" pitchFamily="34" charset="-122"/>
@@ -10023,7 +10003,7 @@
             <a:r>
               <a:rPr lang="en-US" sz="1100" dirty="0">
                 <a:solidFill>
-                  <a:srgbClr val="93ABA0"/>
+                  <a:srgbClr val="55677A"/>
                 </a:solidFill>
                 <a:latin typeface="Calibri" pitchFamily="34" charset="0"/>
                 <a:ea typeface="Calibri" pitchFamily="34" charset="-122"/>
@@ -10052,11 +10032,11 @@
             </a:avLst>
           </a:prstGeom>
           <a:solidFill>
-            <a:srgbClr val="0D1520"/>
+            <a:srgbClr val="F5F7F9"/>
           </a:solidFill>
           <a:ln w="12700">
             <a:solidFill>
-              <a:srgbClr val="1E2D33"/>
+              <a:srgbClr val="DCE3EB"/>
             </a:solidFill>
             <a:prstDash val="solid"/>
           </a:ln>
@@ -10148,7 +10128,7 @@
             <a:r>
               <a:rPr lang="en-US" sz="1350" b="1" dirty="0">
                 <a:solidFill>
-                  <a:srgbClr val="E6F2EA"/>
+                  <a:srgbClr val="13202E"/>
                 </a:solidFill>
                 <a:latin typeface="Calibri" pitchFamily="34" charset="0"/>
                 <a:ea typeface="Calibri" pitchFamily="34" charset="-122"/>
@@ -10187,7 +10167,7 @@
             <a:r>
               <a:rPr lang="en-US" sz="1100" dirty="0">
                 <a:solidFill>
-                  <a:srgbClr val="93ABA0"/>
+                  <a:srgbClr val="55677A"/>
                 </a:solidFill>
                 <a:latin typeface="Calibri" pitchFamily="34" charset="0"/>
                 <a:ea typeface="Calibri" pitchFamily="34" charset="-122"/>
@@ -10226,7 +10206,7 @@
             <a:r>
               <a:rPr lang="en-US" sz="1150" i="1" dirty="0">
                 <a:solidFill>
-                  <a:srgbClr val="D4A72C"/>
+                  <a:srgbClr val="8F6400"/>
                 </a:solidFill>
                 <a:latin typeface="Calibri" pitchFamily="34" charset="0"/>
                 <a:ea typeface="Calibri" pitchFamily="34" charset="-122"/>
@@ -10265,7 +10245,7 @@
             <a:r>
               <a:rPr lang="en-US" sz="900" dirty="0">
                 <a:solidFill>
-                  <a:srgbClr val="93ABA0"/>
+                  <a:srgbClr val="55677A"/>
                 </a:solidFill>
                 <a:latin typeface="Calibri" pitchFamily="34" charset="0"/>
                 <a:ea typeface="Calibri" pitchFamily="34" charset="-122"/>
@@ -10304,7 +10284,7 @@
             <a:r>
               <a:rPr lang="en-US" sz="900" dirty="0">
                 <a:solidFill>
-                  <a:srgbClr val="93ABA0"/>
+                  <a:srgbClr val="55677A"/>
                 </a:solidFill>
                 <a:latin typeface="Calibri" pitchFamily="34" charset="0"/>
                 <a:ea typeface="Calibri" pitchFamily="34" charset="-122"/>
@@ -10330,7 +10310,7 @@
     <p:bg>
       <p:bgPr>
         <a:solidFill>
-          <a:srgbClr val="05090D"/>
+          <a:srgbClr val="FFFFFF"/>
         </a:solidFill>
       </p:bgPr>
     </p:bg>
@@ -10375,7 +10355,7 @@
             <a:r>
               <a:rPr lang="en-US" sz="1100" b="1" spc="300" kern="0" dirty="0">
                 <a:solidFill>
-                  <a:srgbClr val="2ADF8F"/>
+                  <a:srgbClr val="147A3D"/>
                 </a:solidFill>
                 <a:latin typeface="Calibri" pitchFamily="34" charset="0"/>
                 <a:ea typeface="Calibri" pitchFamily="34" charset="-122"/>
@@ -10414,7 +10394,7 @@
             <a:r>
               <a:rPr lang="en-US" sz="3000" b="1" dirty="0">
                 <a:solidFill>
-                  <a:srgbClr val="E6F2EA"/>
+                  <a:srgbClr val="13202E"/>
                 </a:solidFill>
                 <a:latin typeface="Calibri" pitchFamily="34" charset="0"/>
                 <a:ea typeface="Calibri" pitchFamily="34" charset="-122"/>
@@ -10443,11 +10423,11 @@
             </a:avLst>
           </a:prstGeom>
           <a:solidFill>
-            <a:srgbClr val="0D1520"/>
+            <a:srgbClr val="F5F7F9"/>
           </a:solidFill>
           <a:ln w="12700">
             <a:solidFill>
-              <a:srgbClr val="1E2D33"/>
+              <a:srgbClr val="DCE3EB"/>
             </a:solidFill>
             <a:prstDash val="solid"/>
           </a:ln>
@@ -10516,7 +10496,7 @@
             <a:r>
               <a:rPr lang="en-US" sz="1350" b="1" dirty="0">
                 <a:solidFill>
-                  <a:srgbClr val="2ADF8F"/>
+                  <a:srgbClr val="147A3D"/>
                 </a:solidFill>
                 <a:latin typeface="Calibri" pitchFamily="34" charset="0"/>
                 <a:ea typeface="Calibri" pitchFamily="34" charset="-122"/>
@@ -10555,7 +10535,7 @@
             <a:r>
               <a:rPr lang="en-US" sz="1100" dirty="0">
                 <a:solidFill>
-                  <a:srgbClr val="93ABA0"/>
+                  <a:srgbClr val="55677A"/>
                 </a:solidFill>
                 <a:latin typeface="Calibri" pitchFamily="34" charset="0"/>
                 <a:ea typeface="Calibri" pitchFamily="34" charset="-122"/>
@@ -10584,11 +10564,11 @@
             </a:avLst>
           </a:prstGeom>
           <a:solidFill>
-            <a:srgbClr val="0D1520"/>
+            <a:srgbClr val="F5F7F9"/>
           </a:solidFill>
           <a:ln w="12700">
             <a:solidFill>
-              <a:srgbClr val="1E2D33"/>
+              <a:srgbClr val="DCE3EB"/>
             </a:solidFill>
             <a:prstDash val="solid"/>
           </a:ln>
@@ -10657,7 +10637,7 @@
             <a:r>
               <a:rPr lang="en-US" sz="1350" b="1" dirty="0">
                 <a:solidFill>
-                  <a:srgbClr val="58A6FF"/>
+                  <a:srgbClr val="1D63D8"/>
                 </a:solidFill>
                 <a:latin typeface="Calibri" pitchFamily="34" charset="0"/>
                 <a:ea typeface="Calibri" pitchFamily="34" charset="-122"/>
@@ -10696,7 +10676,7 @@
             <a:r>
               <a:rPr lang="en-US" sz="1100" dirty="0">
                 <a:solidFill>
-                  <a:srgbClr val="93ABA0"/>
+                  <a:srgbClr val="55677A"/>
                 </a:solidFill>
                 <a:latin typeface="Calibri" pitchFamily="34" charset="0"/>
                 <a:ea typeface="Calibri" pitchFamily="34" charset="-122"/>
@@ -10725,11 +10705,11 @@
             </a:avLst>
           </a:prstGeom>
           <a:solidFill>
-            <a:srgbClr val="0D1520"/>
+            <a:srgbClr val="F5F7F9"/>
           </a:solidFill>
           <a:ln w="12700">
             <a:solidFill>
-              <a:srgbClr val="1E2D33"/>
+              <a:srgbClr val="DCE3EB"/>
             </a:solidFill>
             <a:prstDash val="solid"/>
           </a:ln>
@@ -10798,7 +10778,7 @@
             <a:r>
               <a:rPr lang="en-US" sz="1350" b="1" dirty="0">
                 <a:solidFill>
-                  <a:srgbClr val="7C88E0"/>
+                  <a:srgbClr val="4A56B8"/>
                 </a:solidFill>
                 <a:latin typeface="Calibri" pitchFamily="34" charset="0"/>
                 <a:ea typeface="Calibri" pitchFamily="34" charset="-122"/>
@@ -10837,7 +10817,7 @@
             <a:r>
               <a:rPr lang="en-US" sz="1100" dirty="0">
                 <a:solidFill>
-                  <a:srgbClr val="93ABA0"/>
+                  <a:srgbClr val="55677A"/>
                 </a:solidFill>
                 <a:latin typeface="Calibri" pitchFamily="34" charset="0"/>
                 <a:ea typeface="Calibri" pitchFamily="34" charset="-122"/>
@@ -10876,7 +10856,7 @@
             <a:r>
               <a:rPr lang="en-US" sz="1100" i="1" dirty="0">
                 <a:solidFill>
-                  <a:srgbClr val="93ABA0"/>
+                  <a:srgbClr val="55677A"/>
                 </a:solidFill>
                 <a:latin typeface="Calibri" pitchFamily="34" charset="0"/>
                 <a:ea typeface="Calibri" pitchFamily="34" charset="-122"/>
@@ -10915,7 +10895,7 @@
             <a:r>
               <a:rPr lang="en-US" sz="900" dirty="0">
                 <a:solidFill>
-                  <a:srgbClr val="93ABA0"/>
+                  <a:srgbClr val="55677A"/>
                 </a:solidFill>
                 <a:latin typeface="Calibri" pitchFamily="34" charset="0"/>
                 <a:ea typeface="Calibri" pitchFamily="34" charset="-122"/>
@@ -10954,7 +10934,7 @@
             <a:r>
               <a:rPr lang="en-US" sz="900" dirty="0">
                 <a:solidFill>
-                  <a:srgbClr val="93ABA0"/>
+                  <a:srgbClr val="55677A"/>
                 </a:solidFill>
                 <a:latin typeface="Calibri" pitchFamily="34" charset="0"/>
                 <a:ea typeface="Calibri" pitchFamily="34" charset="-122"/>
@@ -10980,7 +10960,7 @@
     <p:bg>
       <p:bgPr>
         <a:solidFill>
-          <a:srgbClr val="05090D"/>
+          <a:srgbClr val="FFFFFF"/>
         </a:solidFill>
       </p:bgPr>
     </p:bg>
@@ -11025,7 +11005,7 @@
             <a:r>
               <a:rPr lang="en-US" sz="1100" b="1" spc="300" kern="0" dirty="0">
                 <a:solidFill>
-                  <a:srgbClr val="2ADF8F"/>
+                  <a:srgbClr val="147A3D"/>
                 </a:solidFill>
                 <a:latin typeface="Calibri" pitchFamily="34" charset="0"/>
                 <a:ea typeface="Calibri" pitchFamily="34" charset="-122"/>
@@ -11064,7 +11044,7 @@
             <a:r>
               <a:rPr lang="en-US" sz="3000" b="1" dirty="0">
                 <a:solidFill>
-                  <a:srgbClr val="E6F2EA"/>
+                  <a:srgbClr val="13202E"/>
                 </a:solidFill>
                 <a:latin typeface="Calibri" pitchFamily="34" charset="0"/>
                 <a:ea typeface="Calibri" pitchFamily="34" charset="-122"/>
@@ -11093,11 +11073,11 @@
             </a:avLst>
           </a:prstGeom>
           <a:solidFill>
-            <a:srgbClr val="0D1520"/>
+            <a:srgbClr val="F5F7F9"/>
           </a:solidFill>
           <a:ln w="12700">
             <a:solidFill>
-              <a:srgbClr val="1E2D33"/>
+              <a:srgbClr val="DCE3EB"/>
             </a:solidFill>
             <a:prstDash val="solid"/>
           </a:ln>
@@ -11130,7 +11110,7 @@
             <a:r>
               <a:rPr lang="en-US" sz="1400" b="1" dirty="0">
                 <a:solidFill>
-                  <a:srgbClr val="E6F2EA"/>
+                  <a:srgbClr val="13202E"/>
                 </a:solidFill>
                 <a:latin typeface="Calibri" pitchFamily="34" charset="0"/>
                 <a:ea typeface="Calibri" pitchFamily="34" charset="-122"/>
@@ -11169,7 +11149,7 @@
             <a:r>
               <a:rPr lang="en-US" sz="1050" dirty="0">
                 <a:solidFill>
-                  <a:srgbClr val="93ABA0"/>
+                  <a:srgbClr val="55677A"/>
                 </a:solidFill>
                 <a:latin typeface="Calibri" pitchFamily="34" charset="0"/>
                 <a:ea typeface="Calibri" pitchFamily="34" charset="-122"/>
@@ -11198,11 +11178,11 @@
             </a:avLst>
           </a:prstGeom>
           <a:solidFill>
-            <a:srgbClr val="0D1520"/>
+            <a:srgbClr val="F5F7F9"/>
           </a:solidFill>
           <a:ln w="12700">
             <a:solidFill>
-              <a:srgbClr val="1E2D33"/>
+              <a:srgbClr val="DCE3EB"/>
             </a:solidFill>
             <a:prstDash val="solid"/>
           </a:ln>
@@ -11235,7 +11215,7 @@
             <a:r>
               <a:rPr lang="en-US" sz="1400" b="1" dirty="0">
                 <a:solidFill>
-                  <a:srgbClr val="E6F2EA"/>
+                  <a:srgbClr val="13202E"/>
                 </a:solidFill>
                 <a:latin typeface="Calibri" pitchFamily="34" charset="0"/>
                 <a:ea typeface="Calibri" pitchFamily="34" charset="-122"/>
@@ -11274,7 +11254,7 @@
             <a:r>
               <a:rPr lang="en-US" sz="1050" dirty="0">
                 <a:solidFill>
-                  <a:srgbClr val="93ABA0"/>
+                  <a:srgbClr val="55677A"/>
                 </a:solidFill>
                 <a:latin typeface="Calibri" pitchFamily="34" charset="0"/>
                 <a:ea typeface="Calibri" pitchFamily="34" charset="-122"/>
@@ -11303,11 +11283,11 @@
             </a:avLst>
           </a:prstGeom>
           <a:solidFill>
-            <a:srgbClr val="0D1520"/>
+            <a:srgbClr val="F5F7F9"/>
           </a:solidFill>
           <a:ln w="12700">
             <a:solidFill>
-              <a:srgbClr val="1E2D33"/>
+              <a:srgbClr val="DCE3EB"/>
             </a:solidFill>
             <a:prstDash val="solid"/>
           </a:ln>
@@ -11340,7 +11320,7 @@
             <a:r>
               <a:rPr lang="en-US" sz="1400" b="1" dirty="0">
                 <a:solidFill>
-                  <a:srgbClr val="E6F2EA"/>
+                  <a:srgbClr val="13202E"/>
                 </a:solidFill>
                 <a:latin typeface="Calibri" pitchFamily="34" charset="0"/>
                 <a:ea typeface="Calibri" pitchFamily="34" charset="-122"/>
@@ -11379,7 +11359,7 @@
             <a:r>
               <a:rPr lang="en-US" sz="1050" dirty="0">
                 <a:solidFill>
-                  <a:srgbClr val="93ABA0"/>
+                  <a:srgbClr val="55677A"/>
                 </a:solidFill>
                 <a:latin typeface="Calibri" pitchFamily="34" charset="0"/>
                 <a:ea typeface="Calibri" pitchFamily="34" charset="-122"/>
@@ -11408,11 +11388,11 @@
             </a:avLst>
           </a:prstGeom>
           <a:solidFill>
-            <a:srgbClr val="0D1520"/>
+            <a:srgbClr val="F5F7F9"/>
           </a:solidFill>
           <a:ln w="12700">
             <a:solidFill>
-              <a:srgbClr val="1E2D33"/>
+              <a:srgbClr val="DCE3EB"/>
             </a:solidFill>
             <a:prstDash val="solid"/>
           </a:ln>
@@ -11445,7 +11425,7 @@
             <a:r>
               <a:rPr lang="en-US" sz="1400" b="1" dirty="0">
                 <a:solidFill>
-                  <a:srgbClr val="E6F2EA"/>
+                  <a:srgbClr val="13202E"/>
                 </a:solidFill>
                 <a:latin typeface="Calibri" pitchFamily="34" charset="0"/>
                 <a:ea typeface="Calibri" pitchFamily="34" charset="-122"/>
@@ -11484,7 +11464,7 @@
             <a:r>
               <a:rPr lang="en-US" sz="1050" dirty="0">
                 <a:solidFill>
-                  <a:srgbClr val="93ABA0"/>
+                  <a:srgbClr val="55677A"/>
                 </a:solidFill>
                 <a:latin typeface="Calibri" pitchFamily="34" charset="0"/>
                 <a:ea typeface="Calibri" pitchFamily="34" charset="-122"/>
@@ -11513,11 +11493,11 @@
             </a:avLst>
           </a:prstGeom>
           <a:solidFill>
-            <a:srgbClr val="0D1520"/>
+            <a:srgbClr val="F5F7F9"/>
           </a:solidFill>
           <a:ln w="12700">
             <a:solidFill>
-              <a:srgbClr val="1E2D33"/>
+              <a:srgbClr val="DCE3EB"/>
             </a:solidFill>
             <a:prstDash val="solid"/>
           </a:ln>
@@ -11550,7 +11530,7 @@
             <a:r>
               <a:rPr lang="en-US" sz="1400" b="1" dirty="0">
                 <a:solidFill>
-                  <a:srgbClr val="E6F2EA"/>
+                  <a:srgbClr val="13202E"/>
                 </a:solidFill>
                 <a:latin typeface="Calibri" pitchFamily="34" charset="0"/>
                 <a:ea typeface="Calibri" pitchFamily="34" charset="-122"/>
@@ -11589,7 +11569,7 @@
             <a:r>
               <a:rPr lang="en-US" sz="1050" dirty="0">
                 <a:solidFill>
-                  <a:srgbClr val="93ABA0"/>
+                  <a:srgbClr val="55677A"/>
                 </a:solidFill>
                 <a:latin typeface="Calibri" pitchFamily="34" charset="0"/>
                 <a:ea typeface="Calibri" pitchFamily="34" charset="-122"/>
@@ -11618,11 +11598,11 @@
             </a:avLst>
           </a:prstGeom>
           <a:solidFill>
-            <a:srgbClr val="0D1520"/>
+            <a:srgbClr val="F5F7F9"/>
           </a:solidFill>
           <a:ln w="12700">
             <a:solidFill>
-              <a:srgbClr val="1E2D33"/>
+              <a:srgbClr val="DCE3EB"/>
             </a:solidFill>
             <a:prstDash val="solid"/>
           </a:ln>
@@ -11655,7 +11635,7 @@
             <a:r>
               <a:rPr lang="en-US" sz="1400" b="1" dirty="0">
                 <a:solidFill>
-                  <a:srgbClr val="E6F2EA"/>
+                  <a:srgbClr val="13202E"/>
                 </a:solidFill>
                 <a:latin typeface="Calibri" pitchFamily="34" charset="0"/>
                 <a:ea typeface="Calibri" pitchFamily="34" charset="-122"/>
@@ -11694,7 +11674,7 @@
             <a:r>
               <a:rPr lang="en-US" sz="1050" dirty="0">
                 <a:solidFill>
-                  <a:srgbClr val="93ABA0"/>
+                  <a:srgbClr val="55677A"/>
                 </a:solidFill>
                 <a:latin typeface="Calibri" pitchFamily="34" charset="0"/>
                 <a:ea typeface="Calibri" pitchFamily="34" charset="-122"/>
@@ -11737,7 +11717,7 @@
             <a:r>
               <a:rPr lang="en-US" sz="1250" dirty="0">
                 <a:solidFill>
-                  <a:srgbClr val="93ABA0"/>
+                  <a:srgbClr val="55677A"/>
                 </a:solidFill>
                 <a:latin typeface="Calibri" pitchFamily="34" charset="0"/>
                 <a:ea typeface="Calibri" pitchFamily="34" charset="-122"/>
@@ -11758,7 +11738,7 @@
             <a:r>
               <a:rPr lang="en-US" sz="1250" dirty="0">
                 <a:solidFill>
-                  <a:srgbClr val="93ABA0"/>
+                  <a:srgbClr val="55677A"/>
                 </a:solidFill>
                 <a:latin typeface="Calibri" pitchFamily="34" charset="0"/>
                 <a:ea typeface="Calibri" pitchFamily="34" charset="-122"/>
@@ -11797,7 +11777,7 @@
             <a:r>
               <a:rPr lang="en-US" sz="900" dirty="0">
                 <a:solidFill>
-                  <a:srgbClr val="93ABA0"/>
+                  <a:srgbClr val="55677A"/>
                 </a:solidFill>
                 <a:latin typeface="Calibri" pitchFamily="34" charset="0"/>
                 <a:ea typeface="Calibri" pitchFamily="34" charset="-122"/>
@@ -11836,7 +11816,7 @@
             <a:r>
               <a:rPr lang="en-US" sz="900" dirty="0">
                 <a:solidFill>
-                  <a:srgbClr val="93ABA0"/>
+                  <a:srgbClr val="55677A"/>
                 </a:solidFill>
                 <a:latin typeface="Calibri" pitchFamily="34" charset="0"/>
                 <a:ea typeface="Calibri" pitchFamily="34" charset="-122"/>
@@ -11862,7 +11842,7 @@
     <p:bg>
       <p:bgPr>
         <a:solidFill>
-          <a:srgbClr val="05090D"/>
+          <a:srgbClr val="FFFFFF"/>
         </a:solidFill>
       </p:bgPr>
     </p:bg>
@@ -11907,7 +11887,7 @@
             <a:r>
               <a:rPr lang="en-US" sz="1100" b="1" spc="300" kern="0" dirty="0">
                 <a:solidFill>
-                  <a:srgbClr val="2ADF8F"/>
+                  <a:srgbClr val="147A3D"/>
                 </a:solidFill>
                 <a:latin typeface="Calibri" pitchFamily="34" charset="0"/>
                 <a:ea typeface="Calibri" pitchFamily="34" charset="-122"/>
@@ -11946,7 +11926,7 @@
             <a:r>
               <a:rPr lang="en-US" sz="3000" b="1" dirty="0">
                 <a:solidFill>
-                  <a:srgbClr val="E6F2EA"/>
+                  <a:srgbClr val="13202E"/>
                 </a:solidFill>
                 <a:latin typeface="Calibri" pitchFamily="34" charset="0"/>
                 <a:ea typeface="Calibri" pitchFamily="34" charset="-122"/>
@@ -11989,7 +11969,7 @@
             <a:r>
               <a:rPr lang="en-US" sz="1400" dirty="0">
                 <a:solidFill>
-                  <a:srgbClr val="E6F2EA"/>
+                  <a:srgbClr val="13202E"/>
                 </a:solidFill>
                 <a:latin typeface="Calibri" pitchFamily="34" charset="0"/>
                 <a:ea typeface="Calibri" pitchFamily="34" charset="-122"/>
@@ -12010,7 +11990,7 @@
             <a:r>
               <a:rPr lang="en-US" sz="1400" dirty="0">
                 <a:solidFill>
-                  <a:srgbClr val="E6F2EA"/>
+                  <a:srgbClr val="13202E"/>
                 </a:solidFill>
                 <a:latin typeface="Calibri" pitchFamily="34" charset="0"/>
                 <a:ea typeface="Calibri" pitchFamily="34" charset="-122"/>
@@ -12031,7 +12011,7 @@
             <a:r>
               <a:rPr lang="en-US" sz="1400" dirty="0">
                 <a:solidFill>
-                  <a:srgbClr val="E6F2EA"/>
+                  <a:srgbClr val="13202E"/>
                 </a:solidFill>
                 <a:latin typeface="Calibri" pitchFamily="34" charset="0"/>
                 <a:ea typeface="Calibri" pitchFamily="34" charset="-122"/>
@@ -12052,7 +12032,7 @@
             <a:r>
               <a:rPr lang="en-US" sz="1400" dirty="0">
                 <a:solidFill>
-                  <a:srgbClr val="E6F2EA"/>
+                  <a:srgbClr val="13202E"/>
                 </a:solidFill>
                 <a:latin typeface="Calibri" pitchFamily="34" charset="0"/>
                 <a:ea typeface="Calibri" pitchFamily="34" charset="-122"/>
@@ -12073,7 +12053,7 @@
             <a:r>
               <a:rPr lang="en-US" sz="1400" dirty="0">
                 <a:solidFill>
-                  <a:srgbClr val="E6F2EA"/>
+                  <a:srgbClr val="13202E"/>
                 </a:solidFill>
                 <a:latin typeface="Calibri" pitchFamily="34" charset="0"/>
                 <a:ea typeface="Calibri" pitchFamily="34" charset="-122"/>
@@ -12102,11 +12082,11 @@
             </a:avLst>
           </a:prstGeom>
           <a:solidFill>
-            <a:srgbClr val="0D1520"/>
+            <a:srgbClr val="F5F7F9"/>
           </a:solidFill>
           <a:ln w="12700">
             <a:solidFill>
-              <a:srgbClr val="1E2D33"/>
+              <a:srgbClr val="DCE3EB"/>
             </a:solidFill>
             <a:prstDash val="solid"/>
           </a:ln>
@@ -12139,7 +12119,7 @@
             <a:r>
               <a:rPr lang="en-US" sz="1050" b="1" spc="200" kern="0" dirty="0">
                 <a:solidFill>
-                  <a:srgbClr val="93ABA0"/>
+                  <a:srgbClr val="55677A"/>
                 </a:solidFill>
                 <a:latin typeface="Calibri" pitchFamily="34" charset="0"/>
                 <a:ea typeface="Calibri" pitchFamily="34" charset="-122"/>
@@ -12182,7 +12162,7 @@
             <a:r>
               <a:rPr lang="en-US" sz="1250" dirty="0">
                 <a:solidFill>
-                  <a:srgbClr val="E6F2EA"/>
+                  <a:srgbClr val="13202E"/>
                 </a:solidFill>
                 <a:latin typeface="Calibri" pitchFamily="34" charset="0"/>
                 <a:ea typeface="Calibri" pitchFamily="34" charset="-122"/>
@@ -12203,7 +12183,7 @@
             <a:r>
               <a:rPr lang="en-US" sz="1250" dirty="0">
                 <a:solidFill>
-                  <a:srgbClr val="E6F2EA"/>
+                  <a:srgbClr val="13202E"/>
                 </a:solidFill>
                 <a:latin typeface="Calibri" pitchFamily="34" charset="0"/>
                 <a:ea typeface="Calibri" pitchFamily="34" charset="-122"/>
@@ -12224,7 +12204,7 @@
             <a:r>
               <a:rPr lang="en-US" sz="1250" dirty="0">
                 <a:solidFill>
-                  <a:srgbClr val="E6F2EA"/>
+                  <a:srgbClr val="13202E"/>
                 </a:solidFill>
                 <a:latin typeface="Calibri" pitchFamily="34" charset="0"/>
                 <a:ea typeface="Calibri" pitchFamily="34" charset="-122"/>
@@ -12245,7 +12225,7 @@
             <a:r>
               <a:rPr lang="en-US" sz="1250" dirty="0">
                 <a:solidFill>
-                  <a:srgbClr val="E6F2EA"/>
+                  <a:srgbClr val="13202E"/>
                 </a:solidFill>
                 <a:latin typeface="Calibri" pitchFamily="34" charset="0"/>
                 <a:ea typeface="Calibri" pitchFamily="34" charset="-122"/>
@@ -12284,7 +12264,7 @@
             <a:r>
               <a:rPr lang="en-US" sz="900" dirty="0">
                 <a:solidFill>
-                  <a:srgbClr val="93ABA0"/>
+                  <a:srgbClr val="55677A"/>
                 </a:solidFill>
                 <a:latin typeface="Calibri" pitchFamily="34" charset="0"/>
                 <a:ea typeface="Calibri" pitchFamily="34" charset="-122"/>
@@ -12323,7 +12303,7 @@
             <a:r>
               <a:rPr lang="en-US" sz="900" dirty="0">
                 <a:solidFill>
-                  <a:srgbClr val="93ABA0"/>
+                  <a:srgbClr val="55677A"/>
                 </a:solidFill>
                 <a:latin typeface="Calibri" pitchFamily="34" charset="0"/>
                 <a:ea typeface="Calibri" pitchFamily="34" charset="-122"/>
@@ -12349,7 +12329,7 @@
     <p:bg>
       <p:bgPr>
         <a:solidFill>
-          <a:srgbClr val="05090D"/>
+          <a:srgbClr val="FFFFFF"/>
         </a:solidFill>
       </p:bgPr>
     </p:bg>
@@ -12394,7 +12374,7 @@
             <a:r>
               <a:rPr lang="en-US" sz="1100" b="1" spc="300" kern="0" dirty="0">
                 <a:solidFill>
-                  <a:srgbClr val="2ADF8F"/>
+                  <a:srgbClr val="147A3D"/>
                 </a:solidFill>
                 <a:latin typeface="Calibri" pitchFamily="34" charset="0"/>
                 <a:ea typeface="Calibri" pitchFamily="34" charset="-122"/>
@@ -12433,7 +12413,7 @@
             <a:r>
               <a:rPr lang="en-US" sz="3000" b="1" dirty="0">
                 <a:solidFill>
-                  <a:srgbClr val="E6F2EA"/>
+                  <a:srgbClr val="13202E"/>
                 </a:solidFill>
                 <a:latin typeface="Calibri" pitchFamily="34" charset="0"/>
                 <a:ea typeface="Calibri" pitchFamily="34" charset="-122"/>
@@ -12462,11 +12442,11 @@
             </a:avLst>
           </a:prstGeom>
           <a:solidFill>
-            <a:srgbClr val="0D1520"/>
+            <a:srgbClr val="F5F7F9"/>
           </a:solidFill>
           <a:ln w="12700">
             <a:solidFill>
-              <a:srgbClr val="1E2D33"/>
+              <a:srgbClr val="DCE3EB"/>
             </a:solidFill>
             <a:prstDash val="solid"/>
           </a:ln>
@@ -12535,7 +12515,7 @@
             <a:r>
               <a:rPr lang="en-US" sz="1350" b="1" dirty="0">
                 <a:solidFill>
-                  <a:srgbClr val="2ADF8F"/>
+                  <a:srgbClr val="147A3D"/>
                 </a:solidFill>
                 <a:latin typeface="Calibri" pitchFamily="34" charset="0"/>
                 <a:ea typeface="Calibri" pitchFamily="34" charset="-122"/>
@@ -12574,7 +12554,7 @@
             <a:r>
               <a:rPr lang="en-US" sz="1100" dirty="0">
                 <a:solidFill>
-                  <a:srgbClr val="93ABA0"/>
+                  <a:srgbClr val="55677A"/>
                 </a:solidFill>
                 <a:latin typeface="Calibri" pitchFamily="34" charset="0"/>
                 <a:ea typeface="Calibri" pitchFamily="34" charset="-122"/>
@@ -12603,11 +12583,11 @@
             </a:avLst>
           </a:prstGeom>
           <a:solidFill>
-            <a:srgbClr val="0D1520"/>
+            <a:srgbClr val="F5F7F9"/>
           </a:solidFill>
           <a:ln w="12700">
             <a:solidFill>
-              <a:srgbClr val="1E2D33"/>
+              <a:srgbClr val="DCE3EB"/>
             </a:solidFill>
             <a:prstDash val="solid"/>
           </a:ln>
@@ -12676,7 +12656,7 @@
             <a:r>
               <a:rPr lang="en-US" sz="1350" b="1" dirty="0">
                 <a:solidFill>
-                  <a:srgbClr val="58A6FF"/>
+                  <a:srgbClr val="1D63D8"/>
                 </a:solidFill>
                 <a:latin typeface="Calibri" pitchFamily="34" charset="0"/>
                 <a:ea typeface="Calibri" pitchFamily="34" charset="-122"/>
@@ -12715,7 +12695,7 @@
             <a:r>
               <a:rPr lang="en-US" sz="1100" dirty="0">
                 <a:solidFill>
-                  <a:srgbClr val="93ABA0"/>
+                  <a:srgbClr val="55677A"/>
                 </a:solidFill>
                 <a:latin typeface="Calibri" pitchFamily="34" charset="0"/>
                 <a:ea typeface="Calibri" pitchFamily="34" charset="-122"/>
@@ -12744,11 +12724,11 @@
             </a:avLst>
           </a:prstGeom>
           <a:solidFill>
-            <a:srgbClr val="0D1520"/>
+            <a:srgbClr val="F5F7F9"/>
           </a:solidFill>
           <a:ln w="12700">
             <a:solidFill>
-              <a:srgbClr val="1E2D33"/>
+              <a:srgbClr val="DCE3EB"/>
             </a:solidFill>
             <a:prstDash val="solid"/>
           </a:ln>
@@ -12817,7 +12797,7 @@
             <a:r>
               <a:rPr lang="en-US" sz="1350" b="1" dirty="0">
                 <a:solidFill>
-                  <a:srgbClr val="7C88E0"/>
+                  <a:srgbClr val="4A56B8"/>
                 </a:solidFill>
                 <a:latin typeface="Calibri" pitchFamily="34" charset="0"/>
                 <a:ea typeface="Calibri" pitchFamily="34" charset="-122"/>
@@ -12856,7 +12836,7 @@
             <a:r>
               <a:rPr lang="en-US" sz="1100" dirty="0">
                 <a:solidFill>
-                  <a:srgbClr val="93ABA0"/>
+                  <a:srgbClr val="55677A"/>
                 </a:solidFill>
                 <a:latin typeface="Calibri" pitchFamily="34" charset="0"/>
                 <a:ea typeface="Calibri" pitchFamily="34" charset="-122"/>
@@ -12895,7 +12875,7 @@
             <a:r>
               <a:rPr lang="en-US" sz="900" dirty="0">
                 <a:solidFill>
-                  <a:srgbClr val="93ABA0"/>
+                  <a:srgbClr val="55677A"/>
                 </a:solidFill>
                 <a:latin typeface="Calibri" pitchFamily="34" charset="0"/>
                 <a:ea typeface="Calibri" pitchFamily="34" charset="-122"/>
@@ -12934,7 +12914,7 @@
             <a:r>
               <a:rPr lang="en-US" sz="900" dirty="0">
                 <a:solidFill>
-                  <a:srgbClr val="93ABA0"/>
+                  <a:srgbClr val="55677A"/>
                 </a:solidFill>
                 <a:latin typeface="Calibri" pitchFamily="34" charset="0"/>
                 <a:ea typeface="Calibri" pitchFamily="34" charset="-122"/>
